--- a/modulos/07-armazenamento-processamento/sessao-ao-vivo-armazenamento-processamento.pptx
+++ b/modulos/07-armazenamento-processamento/sessao-ao-vivo-armazenamento-processamento.pptx
@@ -2,26 +2,26 @@
 <file path=ppt/presentation.xml><?xml version="1.0" encoding="utf-8"?>
 <p:presentation xmlns:p="http://schemas.openxmlformats.org/presentationml/2006/main">
   <p:sldMasterIdLst>
-    <p:sldMasterId xmlns:r="http://schemas.openxmlformats.org/officeDocument/2006/relationships" id="2147483648" r:id="Rad126d83562e41ef"/>
+    <p:sldMasterId xmlns:r="http://schemas.openxmlformats.org/officeDocument/2006/relationships" id="2147483648" r:id="R4d4298b2fa694f9a"/>
   </p:sldMasterIdLst>
   <p:notesMasterIdLst>
-    <p:notesMasterId xmlns:r="http://schemas.openxmlformats.org/officeDocument/2006/relationships" r:id="R9ecfea0c425847af"/>
+    <p:notesMasterId xmlns:r="http://schemas.openxmlformats.org/officeDocument/2006/relationships" r:id="R44aa0ecf01b64d4a"/>
   </p:notesMasterIdLst>
   <p:sldIdLst>
-    <p:sldId xmlns:r="http://schemas.openxmlformats.org/officeDocument/2006/relationships" id="256" r:id="R67a6c9fa7baa4971"/>
-    <p:sldId xmlns:r="http://schemas.openxmlformats.org/officeDocument/2006/relationships" id="257" r:id="R465f357154da4fec"/>
-    <p:sldId xmlns:r="http://schemas.openxmlformats.org/officeDocument/2006/relationships" id="258" r:id="Rcdb5552ff2324c60"/>
-    <p:sldId xmlns:r="http://schemas.openxmlformats.org/officeDocument/2006/relationships" id="259" r:id="Re2c20902eee44ac1"/>
-    <p:sldId xmlns:r="http://schemas.openxmlformats.org/officeDocument/2006/relationships" id="260" r:id="R2faa8579678c4f12"/>
-    <p:sldId xmlns:r="http://schemas.openxmlformats.org/officeDocument/2006/relationships" id="261" r:id="R9666f5fc301f4915"/>
-    <p:sldId xmlns:r="http://schemas.openxmlformats.org/officeDocument/2006/relationships" id="262" r:id="R656a296546cf4d7b"/>
-    <p:sldId xmlns:r="http://schemas.openxmlformats.org/officeDocument/2006/relationships" id="263" r:id="Re537804e06254be5"/>
-    <p:sldId xmlns:r="http://schemas.openxmlformats.org/officeDocument/2006/relationships" id="264" r:id="R8a3490384f2a4ca0"/>
-    <p:sldId xmlns:r="http://schemas.openxmlformats.org/officeDocument/2006/relationships" id="265" r:id="R4b68bdbdebd1462c"/>
-    <p:sldId xmlns:r="http://schemas.openxmlformats.org/officeDocument/2006/relationships" id="266" r:id="R3043ba213370409d"/>
-    <p:sldId xmlns:r="http://schemas.openxmlformats.org/officeDocument/2006/relationships" id="267" r:id="Rff291092fdc04fe5"/>
-    <p:sldId xmlns:r="http://schemas.openxmlformats.org/officeDocument/2006/relationships" id="268" r:id="R50cfa7edbad4427b"/>
-    <p:sldId xmlns:r="http://schemas.openxmlformats.org/officeDocument/2006/relationships" id="269" r:id="R8a90b6f2806f44f2"/>
+    <p:sldId xmlns:r="http://schemas.openxmlformats.org/officeDocument/2006/relationships" id="256" r:id="Rdf7233be47494e81"/>
+    <p:sldId xmlns:r="http://schemas.openxmlformats.org/officeDocument/2006/relationships" id="257" r:id="Rc0f11ad2c7b74953"/>
+    <p:sldId xmlns:r="http://schemas.openxmlformats.org/officeDocument/2006/relationships" id="258" r:id="Rc3fc0b8615b0423d"/>
+    <p:sldId xmlns:r="http://schemas.openxmlformats.org/officeDocument/2006/relationships" id="259" r:id="R372988feb0324021"/>
+    <p:sldId xmlns:r="http://schemas.openxmlformats.org/officeDocument/2006/relationships" id="260" r:id="Reea65c4d0e6e4c49"/>
+    <p:sldId xmlns:r="http://schemas.openxmlformats.org/officeDocument/2006/relationships" id="261" r:id="Reaaa9c6a3a65463d"/>
+    <p:sldId xmlns:r="http://schemas.openxmlformats.org/officeDocument/2006/relationships" id="262" r:id="Rc26cc4680d234d37"/>
+    <p:sldId xmlns:r="http://schemas.openxmlformats.org/officeDocument/2006/relationships" id="263" r:id="R32e3999b2fac44c9"/>
+    <p:sldId xmlns:r="http://schemas.openxmlformats.org/officeDocument/2006/relationships" id="264" r:id="R9208733f17f64e69"/>
+    <p:sldId xmlns:r="http://schemas.openxmlformats.org/officeDocument/2006/relationships" id="265" r:id="Ra9a75a3a12be49fc"/>
+    <p:sldId xmlns:r="http://schemas.openxmlformats.org/officeDocument/2006/relationships" id="266" r:id="Rff9b71c86e534be4"/>
+    <p:sldId xmlns:r="http://schemas.openxmlformats.org/officeDocument/2006/relationships" id="267" r:id="Rd3bae00304b646b0"/>
+    <p:sldId xmlns:r="http://schemas.openxmlformats.org/officeDocument/2006/relationships" id="268" r:id="Rcddf82247042470c"/>
+    <p:sldId xmlns:r="http://schemas.openxmlformats.org/officeDocument/2006/relationships" id="269" r:id="R789737f423a2482b"/>
   </p:sldIdLst>
   <p:sldSz cx="12192000" cy="6858000"/>
   <p:notesSz cx="6858000" cy="9144000"/>
@@ -1426,7 +1426,7 @@
   </p:cSld>
   <p:clrMap bg1="lt1" tx1="dk1" bg2="lt2" tx2="dk2" accent1="accent1" accent2="accent2" accent3="accent3" accent4="accent4" accent5="accent5" accent6="accent6" hlink="hlink" folHlink="folHlink"/>
   <p:sldLayoutIdLst>
-    <p:sldLayoutId xmlns:r="http://schemas.openxmlformats.org/officeDocument/2006/relationships" id="2147483649" r:id="R6bf6a08fd8394152"/>
+    <p:sldLayoutId xmlns:r="http://schemas.openxmlformats.org/officeDocument/2006/relationships" id="2147483649" r:id="Rbeb3754d48f44724"/>
   </p:sldLayoutIdLst>
   <p:txStyles>
     <p:titleStyle>
@@ -1714,7 +1714,7 @@
     <p:bg>
       <p:bgPr>
         <a:solidFill xmlns:a="http://schemas.openxmlformats.org/drawingml/2006/main">
-          <a:srgbClr val="0E1B3E"/>
+          <a:srgbClr val="070F26"/>
         </a:solidFill>
       </p:bgPr>
     </p:bg>
@@ -1732,7 +1732,7 @@
           <p:cNvPr id="1" name="">
             <a:extLst xmlns:a="http://schemas.openxmlformats.org/drawingml/2006/main">
               <a:ext uri="{FF2B5EF4-FFF2-40B4-BE49-F238E27FC236}">
-                <a16:creationId xmlns:a16="http://schemas.microsoft.com/office/drawing/2014/main" id="{D910D6FA-1AEB-4EDA-B2C4-D67AA094F089}"/>
+                <a16:creationId xmlns:a16="http://schemas.microsoft.com/office/drawing/2014/main" id="{60D2467B-FB09-4CEF-AA93-D33ABB7BD7E8}"/>
               </a:ext>
             </a:extLst>
           </p:cNvPr>
@@ -1750,7 +1750,7 @@
             <a:avLst/>
           </a:prstGeom>
           <a:solidFill xmlns:a="http://schemas.openxmlformats.org/drawingml/2006/main">
-            <a:srgbClr val="0E1B3E"/>
+            <a:srgbClr val="070F26"/>
           </a:solidFill>
           <a:ln xmlns:a="http://schemas.openxmlformats.org/drawingml/2006/main" w="0">
             <a:solidFill>
@@ -1771,7 +1771,7 @@
           <p:nvPr/>
         </p:nvPicPr>
         <p:blipFill>
-          <a:blip xmlns:r="http://schemas.openxmlformats.org/officeDocument/2006/relationships" xmlns:a="http://schemas.openxmlformats.org/drawingml/2006/main" r:embed="R531105c5026b4043"/>
+          <a:blip xmlns:r="http://schemas.openxmlformats.org/officeDocument/2006/relationships" xmlns:a="http://schemas.openxmlformats.org/drawingml/2006/main" r:embed="Re8df55ae783a4efe"/>
           <a:stretch xmlns:a="http://schemas.openxmlformats.org/drawingml/2006/main"/>
         </p:blipFill>
         <p:spPr>
@@ -1789,7 +1789,7 @@
           <p:cNvPr id="3" name="">
             <a:extLst xmlns:a="http://schemas.openxmlformats.org/drawingml/2006/main">
               <a:ext uri="{FF2B5EF4-FFF2-40B4-BE49-F238E27FC236}">
-                <a16:creationId xmlns:a16="http://schemas.microsoft.com/office/drawing/2014/main" id="{99AF508A-D095-4AD8-8587-9F1F6037A316}"/>
+                <a16:creationId xmlns:a16="http://schemas.microsoft.com/office/drawing/2014/main" id="{297A4FCE-5E38-4C0E-BF64-60E77631F204}"/>
               </a:ext>
             </a:extLst>
           </p:cNvPr>
@@ -1847,7 +1847,7 @@
           <p:cNvPr id="4" name="">
             <a:extLst xmlns:a="http://schemas.openxmlformats.org/drawingml/2006/main">
               <a:ext uri="{FF2B5EF4-FFF2-40B4-BE49-F238E27FC236}">
-                <a16:creationId xmlns:a16="http://schemas.microsoft.com/office/drawing/2014/main" id="{547A92FE-9F85-4860-9410-9946FCDE11B0}"/>
+                <a16:creationId xmlns:a16="http://schemas.microsoft.com/office/drawing/2014/main" id="{616AC212-6AE3-4F5E-86A8-16C03F940F89}"/>
               </a:ext>
             </a:extLst>
           </p:cNvPr>
@@ -1905,7 +1905,7 @@
           <p:cNvPr id="5" name="">
             <a:extLst xmlns:a="http://schemas.openxmlformats.org/drawingml/2006/main">
               <a:ext uri="{FF2B5EF4-FFF2-40B4-BE49-F238E27FC236}">
-                <a16:creationId xmlns:a16="http://schemas.microsoft.com/office/drawing/2014/main" id="{ABCA655A-8952-4D88-B6C7-E6874F96C4BC}"/>
+                <a16:creationId xmlns:a16="http://schemas.microsoft.com/office/drawing/2014/main" id="{7FBDD06C-BE47-4D7F-AA82-22F242C426A3}"/>
               </a:ext>
             </a:extLst>
           </p:cNvPr>
@@ -1967,7 +1967,7 @@
           <p:nvPr/>
         </p:nvPicPr>
         <p:blipFill>
-          <a:blip xmlns:r="http://schemas.openxmlformats.org/officeDocument/2006/relationships" xmlns:a="http://schemas.openxmlformats.org/drawingml/2006/main" r:embed="R134239f289364a18"/>
+          <a:blip xmlns:r="http://schemas.openxmlformats.org/officeDocument/2006/relationships" xmlns:a="http://schemas.openxmlformats.org/drawingml/2006/main" r:embed="Rd38d168a2d5e47cd"/>
           <a:stretch xmlns:a="http://schemas.openxmlformats.org/drawingml/2006/main"/>
         </p:blipFill>
         <p:spPr>
@@ -1985,7 +1985,7 @@
           <p:cNvPr id="7" name="">
             <a:extLst xmlns:a="http://schemas.openxmlformats.org/drawingml/2006/main">
               <a:ext uri="{FF2B5EF4-FFF2-40B4-BE49-F238E27FC236}">
-                <a16:creationId xmlns:a16="http://schemas.microsoft.com/office/drawing/2014/main" id="{4EA74933-9BE4-44A2-9E46-86F307B5B158}"/>
+                <a16:creationId xmlns:a16="http://schemas.microsoft.com/office/drawing/2014/main" id="{39B10058-C0EC-483F-9C17-1016AFAC5B39}"/>
               </a:ext>
             </a:extLst>
           </p:cNvPr>
@@ -2043,7 +2043,7 @@
           <p:cNvPr id="8" name="">
             <a:extLst xmlns:a="http://schemas.openxmlformats.org/drawingml/2006/main">
               <a:ext uri="{FF2B5EF4-FFF2-40B4-BE49-F238E27FC236}">
-                <a16:creationId xmlns:a16="http://schemas.microsoft.com/office/drawing/2014/main" id="{98BE55F6-D12D-4380-8217-2904A30AC511}"/>
+                <a16:creationId xmlns:a16="http://schemas.microsoft.com/office/drawing/2014/main" id="{368CDEA8-FBE4-4532-A1A3-A8A5119BB5E5}"/>
               </a:ext>
             </a:extLst>
           </p:cNvPr>
@@ -2101,7 +2101,7 @@
           <p:cNvPr id="9" name="">
             <a:extLst xmlns:a="http://schemas.openxmlformats.org/drawingml/2006/main">
               <a:ext uri="{FF2B5EF4-FFF2-40B4-BE49-F238E27FC236}">
-                <a16:creationId xmlns:a16="http://schemas.microsoft.com/office/drawing/2014/main" id="{B0F027E1-776F-4921-BDC4-4D4C2D2C83E4}"/>
+                <a16:creationId xmlns:a16="http://schemas.microsoft.com/office/drawing/2014/main" id="{581002A5-B85F-4099-B7BC-95E2AF2B2996}"/>
               </a:ext>
             </a:extLst>
           </p:cNvPr>
@@ -2159,7 +2159,7 @@
           <p:cNvPr id="10" name="">
             <a:extLst xmlns:a="http://schemas.openxmlformats.org/drawingml/2006/main">
               <a:ext uri="{FF2B5EF4-FFF2-40B4-BE49-F238E27FC236}">
-                <a16:creationId xmlns:a16="http://schemas.microsoft.com/office/drawing/2014/main" id="{C95DF3D6-834C-4676-AA07-BC9E4A656030}"/>
+                <a16:creationId xmlns:a16="http://schemas.microsoft.com/office/drawing/2014/main" id="{22F9D799-7169-4EC8-8CE3-79C8171289AA}"/>
               </a:ext>
             </a:extLst>
           </p:cNvPr>
@@ -2194,7 +2194,7 @@
           <p:cNvPr id="11" name="">
             <a:extLst xmlns:a="http://schemas.openxmlformats.org/drawingml/2006/main">
               <a:ext uri="{FF2B5EF4-FFF2-40B4-BE49-F238E27FC236}">
-                <a16:creationId xmlns:a16="http://schemas.microsoft.com/office/drawing/2014/main" id="{0B57C536-7AD2-4F30-ACDC-24BE4D24FB2B}"/>
+                <a16:creationId xmlns:a16="http://schemas.microsoft.com/office/drawing/2014/main" id="{977AA9FA-4AFC-423E-9326-2573C6154B08}"/>
               </a:ext>
             </a:extLst>
           </p:cNvPr>
@@ -2250,7 +2250,7 @@
     </p:spTree>
     <p:extLst>
       <p:ext uri="{BB962C8B-B14F-4D97-AF65-F5344CB8AC3E}">
-        <p14:creationId xmlns:p14="http://schemas.microsoft.com/office/powerpoint/2010/main" val="928807127"/>
+        <p14:creationId xmlns:p14="http://schemas.microsoft.com/office/powerpoint/2010/main" val="1251968571"/>
       </p:ext>
     </p:extLst>
   </p:cSld>
@@ -2263,7 +2263,7 @@
     <p:bg>
       <p:bgPr>
         <a:solidFill xmlns:a="http://schemas.openxmlformats.org/drawingml/2006/main">
-          <a:srgbClr val="0E1B3E"/>
+          <a:srgbClr val="070F26"/>
         </a:solidFill>
       </p:bgPr>
     </p:bg>
@@ -2281,7 +2281,7 @@
           <p:cNvPr id="1" name="">
             <a:extLst xmlns:a="http://schemas.openxmlformats.org/drawingml/2006/main">
               <a:ext uri="{FF2B5EF4-FFF2-40B4-BE49-F238E27FC236}">
-                <a16:creationId xmlns:a16="http://schemas.microsoft.com/office/drawing/2014/main" id="{4868F73F-904B-46CF-A436-447A399DC24A}"/>
+                <a16:creationId xmlns:a16="http://schemas.microsoft.com/office/drawing/2014/main" id="{0769D029-4080-4501-BB6A-5A37195C303C}"/>
               </a:ext>
             </a:extLst>
           </p:cNvPr>
@@ -2299,7 +2299,7 @@
             <a:avLst/>
           </a:prstGeom>
           <a:solidFill xmlns:a="http://schemas.openxmlformats.org/drawingml/2006/main">
-            <a:srgbClr val="0E1B3E"/>
+            <a:srgbClr val="070F26"/>
           </a:solidFill>
           <a:ln xmlns:a="http://schemas.openxmlformats.org/drawingml/2006/main" w="0">
             <a:solidFill>
@@ -2320,7 +2320,7 @@
           <p:nvPr/>
         </p:nvPicPr>
         <p:blipFill>
-          <a:blip xmlns:r="http://schemas.openxmlformats.org/officeDocument/2006/relationships" xmlns:a="http://schemas.openxmlformats.org/drawingml/2006/main" r:embed="R8d4014d38ec84627"/>
+          <a:blip xmlns:r="http://schemas.openxmlformats.org/officeDocument/2006/relationships" xmlns:a="http://schemas.openxmlformats.org/drawingml/2006/main" r:embed="R4b9713a2257a4122"/>
           <a:stretch xmlns:a="http://schemas.openxmlformats.org/drawingml/2006/main"/>
         </p:blipFill>
         <p:spPr>
@@ -2338,7 +2338,7 @@
           <p:cNvPr id="3" name="">
             <a:extLst xmlns:a="http://schemas.openxmlformats.org/drawingml/2006/main">
               <a:ext uri="{FF2B5EF4-FFF2-40B4-BE49-F238E27FC236}">
-                <a16:creationId xmlns:a16="http://schemas.microsoft.com/office/drawing/2014/main" id="{209A2CC5-190B-44BA-8368-CD4BCF138FCA}"/>
+                <a16:creationId xmlns:a16="http://schemas.microsoft.com/office/drawing/2014/main" id="{5C7C78E9-8879-4498-B7F7-F6B5AD95FB56}"/>
               </a:ext>
             </a:extLst>
           </p:cNvPr>
@@ -2396,7 +2396,7 @@
           <p:cNvPr id="4" name="">
             <a:extLst xmlns:a="http://schemas.openxmlformats.org/drawingml/2006/main">
               <a:ext uri="{FF2B5EF4-FFF2-40B4-BE49-F238E27FC236}">
-                <a16:creationId xmlns:a16="http://schemas.microsoft.com/office/drawing/2014/main" id="{97D8C286-D6A8-4426-A1A6-2B81D577AF2E}"/>
+                <a16:creationId xmlns:a16="http://schemas.microsoft.com/office/drawing/2014/main" id="{43D710AF-6C11-4FA0-BA3A-A1392599C721}"/>
               </a:ext>
             </a:extLst>
           </p:cNvPr>
@@ -2454,7 +2454,7 @@
           <p:cNvPr id="5" name="">
             <a:extLst xmlns:a="http://schemas.openxmlformats.org/drawingml/2006/main">
               <a:ext uri="{FF2B5EF4-FFF2-40B4-BE49-F238E27FC236}">
-                <a16:creationId xmlns:a16="http://schemas.microsoft.com/office/drawing/2014/main" id="{27B90B2D-6746-412F-BDDD-CC27EF8D8B15}"/>
+                <a16:creationId xmlns:a16="http://schemas.microsoft.com/office/drawing/2014/main" id="{B4033D7B-49A1-42A3-A685-05B5F67045D9}"/>
               </a:ext>
             </a:extLst>
           </p:cNvPr>
@@ -2512,7 +2512,7 @@
           <p:cNvPr id="6" name="">
             <a:extLst xmlns:a="http://schemas.openxmlformats.org/drawingml/2006/main">
               <a:ext uri="{FF2B5EF4-FFF2-40B4-BE49-F238E27FC236}">
-                <a16:creationId xmlns:a16="http://schemas.microsoft.com/office/drawing/2014/main" id="{E12E8373-D789-4643-A496-04796FAC1D2F}"/>
+                <a16:creationId xmlns:a16="http://schemas.microsoft.com/office/drawing/2014/main" id="{1CC0A6D8-3939-4282-BEB0-3FD2A6C31CA3}"/>
               </a:ext>
             </a:extLst>
           </p:cNvPr>
@@ -2574,13 +2574,13 @@
           <p:nvPr/>
         </p:nvPicPr>
         <p:blipFill>
-          <a:blip xmlns:r="http://schemas.openxmlformats.org/officeDocument/2006/relationships" xmlns:a="http://schemas.openxmlformats.org/drawingml/2006/main" r:embed="Re34c0fbca0c64837"/>
+          <a:blip xmlns:r="http://schemas.openxmlformats.org/officeDocument/2006/relationships" xmlns:a="http://schemas.openxmlformats.org/drawingml/2006/main" r:embed="R879dbccc38824412"/>
           <a:stretch xmlns:a="http://schemas.openxmlformats.org/drawingml/2006/main"/>
         </p:blipFill>
         <p:spPr>
           <a:xfrm xmlns:a="http://schemas.openxmlformats.org/drawingml/2006/main">
-            <a:off x="476250" y="1257300"/>
-            <a:ext cx="2667000" cy="4533900"/>
+            <a:off x="0" y="1746250"/>
+            <a:ext cx="2667000" cy="3556000"/>
           </a:xfrm>
           <a:prstGeom xmlns:a="http://schemas.openxmlformats.org/drawingml/2006/main" prst="rect">
             <a:avLst/>
@@ -2592,7 +2592,7 @@
           <p:cNvPr id="8" name="">
             <a:extLst xmlns:a="http://schemas.openxmlformats.org/drawingml/2006/main">
               <a:ext uri="{FF2B5EF4-FFF2-40B4-BE49-F238E27FC236}">
-                <a16:creationId xmlns:a16="http://schemas.microsoft.com/office/drawing/2014/main" id="{C8F6AE86-15F2-47BD-B420-37B9389DAD2B}"/>
+                <a16:creationId xmlns:a16="http://schemas.microsoft.com/office/drawing/2014/main" id="{49A3E3B4-135D-495F-998E-1ABE7FFA8411}"/>
               </a:ext>
             </a:extLst>
           </p:cNvPr>
@@ -2650,7 +2650,7 @@
           <p:cNvPr id="9" name="">
             <a:extLst xmlns:a="http://schemas.openxmlformats.org/drawingml/2006/main">
               <a:ext uri="{FF2B5EF4-FFF2-40B4-BE49-F238E27FC236}">
-                <a16:creationId xmlns:a16="http://schemas.microsoft.com/office/drawing/2014/main" id="{F0952977-3B77-46E8-AAB7-5340E7581328}"/>
+                <a16:creationId xmlns:a16="http://schemas.microsoft.com/office/drawing/2014/main" id="{3E4B6676-4214-4206-A99A-98BAEE7C5F44}"/>
               </a:ext>
             </a:extLst>
           </p:cNvPr>
@@ -2708,7 +2708,7 @@
           <p:cNvPr id="10" name="">
             <a:extLst xmlns:a="http://schemas.openxmlformats.org/drawingml/2006/main">
               <a:ext uri="{FF2B5EF4-FFF2-40B4-BE49-F238E27FC236}">
-                <a16:creationId xmlns:a16="http://schemas.microsoft.com/office/drawing/2014/main" id="{655FF1E0-E0B4-4A99-B963-3A321FC7CEC6}"/>
+                <a16:creationId xmlns:a16="http://schemas.microsoft.com/office/drawing/2014/main" id="{7B3A72D3-0C4D-4C05-9CE7-F4F32FA24997}"/>
               </a:ext>
             </a:extLst>
           </p:cNvPr>
@@ -2764,7 +2764,7 @@
     </p:spTree>
     <p:extLst>
       <p:ext uri="{BB962C8B-B14F-4D97-AF65-F5344CB8AC3E}">
-        <p14:creationId xmlns:p14="http://schemas.microsoft.com/office/powerpoint/2010/main" val="1422023015"/>
+        <p14:creationId xmlns:p14="http://schemas.microsoft.com/office/powerpoint/2010/main" val="581940857"/>
       </p:ext>
     </p:extLst>
   </p:cSld>
@@ -2795,7 +2795,7 @@
           <p:cNvPr id="1" name="">
             <a:extLst xmlns:a="http://schemas.openxmlformats.org/drawingml/2006/main">
               <a:ext uri="{FF2B5EF4-FFF2-40B4-BE49-F238E27FC236}">
-                <a16:creationId xmlns:a16="http://schemas.microsoft.com/office/drawing/2014/main" id="{6EF08A24-4A04-4810-AEBE-84CF0E06E73A}"/>
+                <a16:creationId xmlns:a16="http://schemas.microsoft.com/office/drawing/2014/main" id="{40EE1D64-53D0-4D7E-A256-2D85F2C01CFE}"/>
               </a:ext>
             </a:extLst>
           </p:cNvPr>
@@ -2834,7 +2834,7 @@
           <p:nvPr/>
         </p:nvPicPr>
         <p:blipFill>
-          <a:blip xmlns:r="http://schemas.openxmlformats.org/officeDocument/2006/relationships" xmlns:a="http://schemas.openxmlformats.org/drawingml/2006/main" r:embed="Reef0d6b646024fe8"/>
+          <a:blip xmlns:r="http://schemas.openxmlformats.org/officeDocument/2006/relationships" xmlns:a="http://schemas.openxmlformats.org/drawingml/2006/main" r:embed="R627d125fa3024eef"/>
           <a:stretch xmlns:a="http://schemas.openxmlformats.org/drawingml/2006/main"/>
         </p:blipFill>
         <p:spPr>
@@ -2852,7 +2852,7 @@
           <p:cNvPr id="3" name="">
             <a:extLst xmlns:a="http://schemas.openxmlformats.org/drawingml/2006/main">
               <a:ext uri="{FF2B5EF4-FFF2-40B4-BE49-F238E27FC236}">
-                <a16:creationId xmlns:a16="http://schemas.microsoft.com/office/drawing/2014/main" id="{1DC78096-DDA0-4654-B89D-75E754E6C189}"/>
+                <a16:creationId xmlns:a16="http://schemas.microsoft.com/office/drawing/2014/main" id="{8CE6290F-6A4A-4032-9632-4893E5B6DE53}"/>
               </a:ext>
             </a:extLst>
           </p:cNvPr>
@@ -2890,14 +2890,14 @@
             <a:pPr algn="r">
               <a:defRPr sz="825" b="1">
                 <a:solidFill>
-                  <a:srgbClr val="0E1B3E"/>
+                  <a:srgbClr val="070F26"/>
                 </a:solidFill>
               </a:defRPr>
             </a:pPr>
             <a:r>
               <a:rPr sz="825" b="1">
                 <a:solidFill>
-                  <a:srgbClr val="0E1B3E"/>
+                  <a:srgbClr val="070F26"/>
                 </a:solidFill>
               </a:rPr>
               <a:t>NTT DATA UNIVERSITY</a:t>
@@ -2910,7 +2910,7 @@
           <p:cNvPr id="4" name="">
             <a:extLst xmlns:a="http://schemas.openxmlformats.org/drawingml/2006/main">
               <a:ext uri="{FF2B5EF4-FFF2-40B4-BE49-F238E27FC236}">
-                <a16:creationId xmlns:a16="http://schemas.microsoft.com/office/drawing/2014/main" id="{82E4FBD2-5161-4346-8445-99D0F897F4C0}"/>
+                <a16:creationId xmlns:a16="http://schemas.microsoft.com/office/drawing/2014/main" id="{A635E920-E8AA-4AD4-907E-FC58795820BA}"/>
               </a:ext>
             </a:extLst>
           </p:cNvPr>
@@ -2968,7 +2968,7 @@
           <p:cNvPr id="5" name="">
             <a:extLst xmlns:a="http://schemas.openxmlformats.org/drawingml/2006/main">
               <a:ext uri="{FF2B5EF4-FFF2-40B4-BE49-F238E27FC236}">
-                <a16:creationId xmlns:a16="http://schemas.microsoft.com/office/drawing/2014/main" id="{CDE90E41-C442-4EB4-90AA-079F80C93C84}"/>
+                <a16:creationId xmlns:a16="http://schemas.microsoft.com/office/drawing/2014/main" id="{938A440D-EE2D-4079-BA36-B39088C40B3C}"/>
               </a:ext>
             </a:extLst>
           </p:cNvPr>
@@ -3026,7 +3026,7 @@
           <p:cNvPr id="6" name="">
             <a:extLst xmlns:a="http://schemas.openxmlformats.org/drawingml/2006/main">
               <a:ext uri="{FF2B5EF4-FFF2-40B4-BE49-F238E27FC236}">
-                <a16:creationId xmlns:a16="http://schemas.microsoft.com/office/drawing/2014/main" id="{168483EA-5AFC-4063-8C36-7CA1BA4F2F0F}"/>
+                <a16:creationId xmlns:a16="http://schemas.microsoft.com/office/drawing/2014/main" id="{638F52EC-716D-437C-919A-A74EF59C3424}"/>
               </a:ext>
             </a:extLst>
           </p:cNvPr>
@@ -3064,14 +3064,14 @@
             <a:pPr algn="r">
               <a:defRPr sz="675" b="1">
                 <a:solidFill>
-                  <a:srgbClr val="0E1B3E"/>
+                  <a:srgbClr val="070F26"/>
                 </a:solidFill>
               </a:defRPr>
             </a:pPr>
             <a:r>
               <a:rPr sz="675" b="1">
                 <a:solidFill>
-                  <a:srgbClr val="0E1B3E"/>
+                  <a:srgbClr val="070F26"/>
                 </a:solidFill>
               </a:rPr>
               <a:t>NTT DATA UNIVERSITY</a:t>
@@ -3084,7 +3084,7 @@
           <p:cNvPr id="7" name="">
             <a:extLst xmlns:a="http://schemas.openxmlformats.org/drawingml/2006/main">
               <a:ext uri="{FF2B5EF4-FFF2-40B4-BE49-F238E27FC236}">
-                <a16:creationId xmlns:a16="http://schemas.microsoft.com/office/drawing/2014/main" id="{70F88372-70D1-4B02-8206-F0319749BD93}"/>
+                <a16:creationId xmlns:a16="http://schemas.microsoft.com/office/drawing/2014/main" id="{49FDFA80-FDFE-476E-9DF3-1E384F39C24E}"/>
               </a:ext>
             </a:extLst>
           </p:cNvPr>
@@ -3142,7 +3142,7 @@
           <p:cNvPr id="8" name="">
             <a:extLst xmlns:a="http://schemas.openxmlformats.org/drawingml/2006/main">
               <a:ext uri="{FF2B5EF4-FFF2-40B4-BE49-F238E27FC236}">
-                <a16:creationId xmlns:a16="http://schemas.microsoft.com/office/drawing/2014/main" id="{407F134D-7667-4A77-916F-2BFF7464A768}"/>
+                <a16:creationId xmlns:a16="http://schemas.microsoft.com/office/drawing/2014/main" id="{3FDBA3B7-8CDE-4451-BB77-95BECB9B302A}"/>
               </a:ext>
             </a:extLst>
           </p:cNvPr>
@@ -3180,14 +3180,14 @@
             <a:pPr algn="l">
               <a:defRPr sz="2400" b="0">
                 <a:solidFill>
-                  <a:srgbClr val="0E1B3E"/>
+                  <a:srgbClr val="070F26"/>
                 </a:solidFill>
               </a:defRPr>
             </a:pPr>
             <a:r>
               <a:rPr sz="2400" b="0">
                 <a:solidFill>
-                  <a:srgbClr val="0E1B3E"/>
+                  <a:srgbClr val="070F26"/>
                 </a:solidFill>
               </a:rPr>
               <a:t>O que muda quando o volume cresce 3 milhões de vezes</a:t>
@@ -3200,7 +3200,7 @@
           <p:cNvPr id="9" name="">
             <a:extLst xmlns:a="http://schemas.openxmlformats.org/drawingml/2006/main">
               <a:ext uri="{FF2B5EF4-FFF2-40B4-BE49-F238E27FC236}">
-                <a16:creationId xmlns:a16="http://schemas.microsoft.com/office/drawing/2014/main" id="{BEE5372D-4AF2-4E9B-9698-F371AB44F022}"/>
+                <a16:creationId xmlns:a16="http://schemas.microsoft.com/office/drawing/2014/main" id="{275250E6-595B-4FD6-841C-92B971409833}"/>
               </a:ext>
             </a:extLst>
           </p:cNvPr>
@@ -3258,7 +3258,7 @@
           <p:cNvPr id="10" name="">
             <a:extLst xmlns:a="http://schemas.openxmlformats.org/drawingml/2006/main">
               <a:ext uri="{FF2B5EF4-FFF2-40B4-BE49-F238E27FC236}">
-                <a16:creationId xmlns:a16="http://schemas.microsoft.com/office/drawing/2014/main" id="{779529E7-045D-4303-91C7-EAB7EB6893BD}"/>
+                <a16:creationId xmlns:a16="http://schemas.microsoft.com/office/drawing/2014/main" id="{66BA1050-E495-4039-BC03-616461D94D18}"/>
               </a:ext>
             </a:extLst>
           </p:cNvPr>
@@ -3291,7 +3291,7 @@
           <p:cNvPr id="11" name="">
             <a:extLst xmlns:a="http://schemas.openxmlformats.org/drawingml/2006/main">
               <a:ext uri="{FF2B5EF4-FFF2-40B4-BE49-F238E27FC236}">
-                <a16:creationId xmlns:a16="http://schemas.microsoft.com/office/drawing/2014/main" id="{98C77F81-662B-477A-9D23-D2EAB6921597}"/>
+                <a16:creationId xmlns:a16="http://schemas.microsoft.com/office/drawing/2014/main" id="{0BF16E67-397F-4E8B-916A-99A61F57E32D}"/>
               </a:ext>
             </a:extLst>
           </p:cNvPr>
@@ -3326,7 +3326,7 @@
           <p:cNvPr id="12" name="">
             <a:extLst xmlns:a="http://schemas.openxmlformats.org/drawingml/2006/main">
               <a:ext uri="{FF2B5EF4-FFF2-40B4-BE49-F238E27FC236}">
-                <a16:creationId xmlns:a16="http://schemas.microsoft.com/office/drawing/2014/main" id="{EC03F981-C2D7-45C9-9755-72E5C9E888BC}"/>
+                <a16:creationId xmlns:a16="http://schemas.microsoft.com/office/drawing/2014/main" id="{63781D0F-85DD-4DC0-9925-779DA2EDC223}"/>
               </a:ext>
             </a:extLst>
           </p:cNvPr>
@@ -3384,7 +3384,7 @@
           <p:cNvPr id="13" name="">
             <a:extLst xmlns:a="http://schemas.openxmlformats.org/drawingml/2006/main">
               <a:ext uri="{FF2B5EF4-FFF2-40B4-BE49-F238E27FC236}">
-                <a16:creationId xmlns:a16="http://schemas.microsoft.com/office/drawing/2014/main" id="{45D6B666-74B0-45D0-8D60-0B1E8D43FEAF}"/>
+                <a16:creationId xmlns:a16="http://schemas.microsoft.com/office/drawing/2014/main" id="{A7C43D10-BAD1-4796-8D22-738598952AA8}"/>
               </a:ext>
             </a:extLst>
           </p:cNvPr>
@@ -3459,7 +3459,7 @@
           <p:cNvPr id="14" name="">
             <a:extLst xmlns:a="http://schemas.openxmlformats.org/drawingml/2006/main">
               <a:ext uri="{FF2B5EF4-FFF2-40B4-BE49-F238E27FC236}">
-                <a16:creationId xmlns:a16="http://schemas.microsoft.com/office/drawing/2014/main" id="{CE58AAF7-CD25-4A4A-B6F9-E80EEBD288C5}"/>
+                <a16:creationId xmlns:a16="http://schemas.microsoft.com/office/drawing/2014/main" id="{F925CC2E-1755-43C4-8D3A-A5BBA0C85592}"/>
               </a:ext>
             </a:extLst>
           </p:cNvPr>
@@ -3492,7 +3492,7 @@
           <p:cNvPr id="15" name="">
             <a:extLst xmlns:a="http://schemas.openxmlformats.org/drawingml/2006/main">
               <a:ext uri="{FF2B5EF4-FFF2-40B4-BE49-F238E27FC236}">
-                <a16:creationId xmlns:a16="http://schemas.microsoft.com/office/drawing/2014/main" id="{DC2FAAD6-D396-4446-9EEB-03F469F3647B}"/>
+                <a16:creationId xmlns:a16="http://schemas.microsoft.com/office/drawing/2014/main" id="{B533671F-524E-4C86-A24C-BB6094F84862}"/>
               </a:ext>
             </a:extLst>
           </p:cNvPr>
@@ -3527,7 +3527,7 @@
           <p:cNvPr id="16" name="">
             <a:extLst xmlns:a="http://schemas.openxmlformats.org/drawingml/2006/main">
               <a:ext uri="{FF2B5EF4-FFF2-40B4-BE49-F238E27FC236}">
-                <a16:creationId xmlns:a16="http://schemas.microsoft.com/office/drawing/2014/main" id="{39DD5906-251C-4EE1-9DA7-51B64EA86672}"/>
+                <a16:creationId xmlns:a16="http://schemas.microsoft.com/office/drawing/2014/main" id="{CB4D9237-6129-4720-96EC-A9BC4516E240}"/>
               </a:ext>
             </a:extLst>
           </p:cNvPr>
@@ -3585,7 +3585,7 @@
           <p:cNvPr id="17" name="">
             <a:extLst xmlns:a="http://schemas.openxmlformats.org/drawingml/2006/main">
               <a:ext uri="{FF2B5EF4-FFF2-40B4-BE49-F238E27FC236}">
-                <a16:creationId xmlns:a16="http://schemas.microsoft.com/office/drawing/2014/main" id="{D9667140-3B39-4C47-84CF-DE73F920026E}"/>
+                <a16:creationId xmlns:a16="http://schemas.microsoft.com/office/drawing/2014/main" id="{6C480036-3B1A-42C0-8EEC-7CD59D1E3EAE}"/>
               </a:ext>
             </a:extLst>
           </p:cNvPr>
@@ -3660,7 +3660,7 @@
           <p:cNvPr id="18" name="">
             <a:extLst xmlns:a="http://schemas.openxmlformats.org/drawingml/2006/main">
               <a:ext uri="{FF2B5EF4-FFF2-40B4-BE49-F238E27FC236}">
-                <a16:creationId xmlns:a16="http://schemas.microsoft.com/office/drawing/2014/main" id="{E0DB58F0-B2ED-4E26-8DD6-5F3EE559D348}"/>
+                <a16:creationId xmlns:a16="http://schemas.microsoft.com/office/drawing/2014/main" id="{4E873619-1958-4208-B06F-A77DA1A1FDCC}"/>
               </a:ext>
             </a:extLst>
           </p:cNvPr>
@@ -3693,7 +3693,7 @@
           <p:cNvPr id="19" name="">
             <a:extLst xmlns:a="http://schemas.openxmlformats.org/drawingml/2006/main">
               <a:ext uri="{FF2B5EF4-FFF2-40B4-BE49-F238E27FC236}">
-                <a16:creationId xmlns:a16="http://schemas.microsoft.com/office/drawing/2014/main" id="{D9DB9C15-0286-4846-A014-E3155AA29ECD}"/>
+                <a16:creationId xmlns:a16="http://schemas.microsoft.com/office/drawing/2014/main" id="{08506F24-4807-450E-AB15-97BACB8A2FB7}"/>
               </a:ext>
             </a:extLst>
           </p:cNvPr>
@@ -3728,7 +3728,7 @@
           <p:cNvPr id="20" name="">
             <a:extLst xmlns:a="http://schemas.openxmlformats.org/drawingml/2006/main">
               <a:ext uri="{FF2B5EF4-FFF2-40B4-BE49-F238E27FC236}">
-                <a16:creationId xmlns:a16="http://schemas.microsoft.com/office/drawing/2014/main" id="{B4E01316-63AA-49A1-A1F9-F48A0D3EDC23}"/>
+                <a16:creationId xmlns:a16="http://schemas.microsoft.com/office/drawing/2014/main" id="{CB789E4F-86E3-44C0-845A-6D72D4AEB11C}"/>
               </a:ext>
             </a:extLst>
           </p:cNvPr>
@@ -3786,7 +3786,7 @@
           <p:cNvPr id="21" name="">
             <a:extLst xmlns:a="http://schemas.openxmlformats.org/drawingml/2006/main">
               <a:ext uri="{FF2B5EF4-FFF2-40B4-BE49-F238E27FC236}">
-                <a16:creationId xmlns:a16="http://schemas.microsoft.com/office/drawing/2014/main" id="{06361BB6-2D99-45AD-95CC-CE62090BEB9C}"/>
+                <a16:creationId xmlns:a16="http://schemas.microsoft.com/office/drawing/2014/main" id="{D7B66B05-864A-489E-8B7E-482A52F6543F}"/>
               </a:ext>
             </a:extLst>
           </p:cNvPr>
@@ -3861,7 +3861,7 @@
           <p:cNvPr id="22" name="">
             <a:extLst xmlns:a="http://schemas.openxmlformats.org/drawingml/2006/main">
               <a:ext uri="{FF2B5EF4-FFF2-40B4-BE49-F238E27FC236}">
-                <a16:creationId xmlns:a16="http://schemas.microsoft.com/office/drawing/2014/main" id="{4BFEF589-980D-413C-9094-E226EB449CE2}"/>
+                <a16:creationId xmlns:a16="http://schemas.microsoft.com/office/drawing/2014/main" id="{A302A8A0-20D7-47FB-BB34-29C9BA25399E}"/>
               </a:ext>
             </a:extLst>
           </p:cNvPr>
@@ -3894,7 +3894,7 @@
           <p:cNvPr id="23" name="">
             <a:extLst xmlns:a="http://schemas.openxmlformats.org/drawingml/2006/main">
               <a:ext uri="{FF2B5EF4-FFF2-40B4-BE49-F238E27FC236}">
-                <a16:creationId xmlns:a16="http://schemas.microsoft.com/office/drawing/2014/main" id="{6CF07E8D-4411-48AA-A7C1-CC5599AE4BED}"/>
+                <a16:creationId xmlns:a16="http://schemas.microsoft.com/office/drawing/2014/main" id="{A5B3F00D-B910-444E-B3AE-EF779EBA8A47}"/>
               </a:ext>
             </a:extLst>
           </p:cNvPr>
@@ -3929,7 +3929,7 @@
           <p:cNvPr id="24" name="">
             <a:extLst xmlns:a="http://schemas.openxmlformats.org/drawingml/2006/main">
               <a:ext uri="{FF2B5EF4-FFF2-40B4-BE49-F238E27FC236}">
-                <a16:creationId xmlns:a16="http://schemas.microsoft.com/office/drawing/2014/main" id="{C43BEC0D-CA89-40F8-941D-E4588F25EBDE}"/>
+                <a16:creationId xmlns:a16="http://schemas.microsoft.com/office/drawing/2014/main" id="{854464BC-8924-4DC5-BA4A-3D89D5801DB7}"/>
               </a:ext>
             </a:extLst>
           </p:cNvPr>
@@ -3987,7 +3987,7 @@
           <p:cNvPr id="25" name="">
             <a:extLst xmlns:a="http://schemas.openxmlformats.org/drawingml/2006/main">
               <a:ext uri="{FF2B5EF4-FFF2-40B4-BE49-F238E27FC236}">
-                <a16:creationId xmlns:a16="http://schemas.microsoft.com/office/drawing/2014/main" id="{EC4720B1-8F38-4CD6-8A5F-AC789432B65C}"/>
+                <a16:creationId xmlns:a16="http://schemas.microsoft.com/office/drawing/2014/main" id="{A38040C5-B0A8-41FF-BF7F-35D1EEF3343E}"/>
               </a:ext>
             </a:extLst>
           </p:cNvPr>
@@ -4060,7 +4060,7 @@
     </p:spTree>
     <p:extLst>
       <p:ext uri="{BB962C8B-B14F-4D97-AF65-F5344CB8AC3E}">
-        <p14:creationId xmlns:p14="http://schemas.microsoft.com/office/powerpoint/2010/main" val="2086832808"/>
+        <p14:creationId xmlns:p14="http://schemas.microsoft.com/office/powerpoint/2010/main" val="2039852087"/>
       </p:ext>
     </p:extLst>
   </p:cSld>
@@ -4091,7 +4091,7 @@
           <p:cNvPr id="1" name="">
             <a:extLst xmlns:a="http://schemas.openxmlformats.org/drawingml/2006/main">
               <a:ext uri="{FF2B5EF4-FFF2-40B4-BE49-F238E27FC236}">
-                <a16:creationId xmlns:a16="http://schemas.microsoft.com/office/drawing/2014/main" id="{3DF9BC8D-4722-4F00-AF23-A3EDD3F34AFD}"/>
+                <a16:creationId xmlns:a16="http://schemas.microsoft.com/office/drawing/2014/main" id="{D410516B-A21A-439E-A3AE-877CCDBA3BCE}"/>
               </a:ext>
             </a:extLst>
           </p:cNvPr>
@@ -4130,7 +4130,7 @@
           <p:nvPr/>
         </p:nvPicPr>
         <p:blipFill>
-          <a:blip xmlns:r="http://schemas.openxmlformats.org/officeDocument/2006/relationships" xmlns:a="http://schemas.openxmlformats.org/drawingml/2006/main" r:embed="R1ca7f30cafa5473f"/>
+          <a:blip xmlns:r="http://schemas.openxmlformats.org/officeDocument/2006/relationships" xmlns:a="http://schemas.openxmlformats.org/drawingml/2006/main" r:embed="R4fff8033055e42ee"/>
           <a:stretch xmlns:a="http://schemas.openxmlformats.org/drawingml/2006/main"/>
         </p:blipFill>
         <p:spPr>
@@ -4148,7 +4148,7 @@
           <p:cNvPr id="3" name="">
             <a:extLst xmlns:a="http://schemas.openxmlformats.org/drawingml/2006/main">
               <a:ext uri="{FF2B5EF4-FFF2-40B4-BE49-F238E27FC236}">
-                <a16:creationId xmlns:a16="http://schemas.microsoft.com/office/drawing/2014/main" id="{94337B9A-B1BB-4D2B-ABB7-523482E935EF}"/>
+                <a16:creationId xmlns:a16="http://schemas.microsoft.com/office/drawing/2014/main" id="{77A404A5-F8AF-46C6-9478-29AC2A1F8E30}"/>
               </a:ext>
             </a:extLst>
           </p:cNvPr>
@@ -4186,14 +4186,14 @@
             <a:pPr algn="r">
               <a:defRPr sz="825" b="1">
                 <a:solidFill>
-                  <a:srgbClr val="0E1B3E"/>
+                  <a:srgbClr val="070F26"/>
                 </a:solidFill>
               </a:defRPr>
             </a:pPr>
             <a:r>
               <a:rPr sz="825" b="1">
                 <a:solidFill>
-                  <a:srgbClr val="0E1B3E"/>
+                  <a:srgbClr val="070F26"/>
                 </a:solidFill>
               </a:rPr>
               <a:t>NTT DATA UNIVERSITY</a:t>
@@ -4206,7 +4206,7 @@
           <p:cNvPr id="4" name="">
             <a:extLst xmlns:a="http://schemas.openxmlformats.org/drawingml/2006/main">
               <a:ext uri="{FF2B5EF4-FFF2-40B4-BE49-F238E27FC236}">
-                <a16:creationId xmlns:a16="http://schemas.microsoft.com/office/drawing/2014/main" id="{8682EAE0-5868-4947-A349-382E475CAC52}"/>
+                <a16:creationId xmlns:a16="http://schemas.microsoft.com/office/drawing/2014/main" id="{CCF6A71B-85CA-4BB5-A020-E2C9FE4458C7}"/>
               </a:ext>
             </a:extLst>
           </p:cNvPr>
@@ -4264,7 +4264,7 @@
           <p:cNvPr id="5" name="">
             <a:extLst xmlns:a="http://schemas.openxmlformats.org/drawingml/2006/main">
               <a:ext uri="{FF2B5EF4-FFF2-40B4-BE49-F238E27FC236}">
-                <a16:creationId xmlns:a16="http://schemas.microsoft.com/office/drawing/2014/main" id="{E1522337-0679-4FFA-8723-7A8856B00654}"/>
+                <a16:creationId xmlns:a16="http://schemas.microsoft.com/office/drawing/2014/main" id="{6B995405-AA65-4CF3-B25C-5A31A905F57E}"/>
               </a:ext>
             </a:extLst>
           </p:cNvPr>
@@ -4322,7 +4322,7 @@
           <p:cNvPr id="6" name="">
             <a:extLst xmlns:a="http://schemas.openxmlformats.org/drawingml/2006/main">
               <a:ext uri="{FF2B5EF4-FFF2-40B4-BE49-F238E27FC236}">
-                <a16:creationId xmlns:a16="http://schemas.microsoft.com/office/drawing/2014/main" id="{8AE84BD1-0571-4C06-9B2A-4DDDD6A51491}"/>
+                <a16:creationId xmlns:a16="http://schemas.microsoft.com/office/drawing/2014/main" id="{16EECD50-2577-40AD-A0E6-3D5CCF17D001}"/>
               </a:ext>
             </a:extLst>
           </p:cNvPr>
@@ -4360,14 +4360,14 @@
             <a:pPr algn="r">
               <a:defRPr sz="675" b="1">
                 <a:solidFill>
-                  <a:srgbClr val="0E1B3E"/>
+                  <a:srgbClr val="070F26"/>
                 </a:solidFill>
               </a:defRPr>
             </a:pPr>
             <a:r>
               <a:rPr sz="675" b="1">
                 <a:solidFill>
-                  <a:srgbClr val="0E1B3E"/>
+                  <a:srgbClr val="070F26"/>
                 </a:solidFill>
               </a:rPr>
               <a:t>NTT DATA UNIVERSITY</a:t>
@@ -4380,7 +4380,7 @@
           <p:cNvPr id="7" name="">
             <a:extLst xmlns:a="http://schemas.openxmlformats.org/drawingml/2006/main">
               <a:ext uri="{FF2B5EF4-FFF2-40B4-BE49-F238E27FC236}">
-                <a16:creationId xmlns:a16="http://schemas.microsoft.com/office/drawing/2014/main" id="{51BF6B92-9AB5-4E83-919E-887B440FBD97}"/>
+                <a16:creationId xmlns:a16="http://schemas.microsoft.com/office/drawing/2014/main" id="{064088A3-9663-4014-A1E7-5460CFCA5230}"/>
               </a:ext>
             </a:extLst>
           </p:cNvPr>
@@ -4438,7 +4438,7 @@
           <p:cNvPr id="8" name="">
             <a:extLst xmlns:a="http://schemas.openxmlformats.org/drawingml/2006/main">
               <a:ext uri="{FF2B5EF4-FFF2-40B4-BE49-F238E27FC236}">
-                <a16:creationId xmlns:a16="http://schemas.microsoft.com/office/drawing/2014/main" id="{9992392D-FF47-4C3F-A38D-D1C2E7EE9C98}"/>
+                <a16:creationId xmlns:a16="http://schemas.microsoft.com/office/drawing/2014/main" id="{BE64173E-7A89-403E-B13E-D221B56EB519}"/>
               </a:ext>
             </a:extLst>
           </p:cNvPr>
@@ -4476,14 +4476,14 @@
             <a:pPr algn="l">
               <a:defRPr sz="2400" b="0">
                 <a:solidFill>
-                  <a:srgbClr val="0E1B3E"/>
+                  <a:srgbClr val="070F26"/>
                 </a:solidFill>
               </a:defRPr>
             </a:pPr>
             <a:r>
               <a:rPr sz="2400" b="0">
                 <a:solidFill>
-                  <a:srgbClr val="0E1B3E"/>
+                  <a:srgbClr val="070F26"/>
                 </a:solidFill>
               </a:rPr>
               <a:t>Recap dos 3 pontos do módulo</a:t>
@@ -4496,7 +4496,7 @@
           <p:cNvPr id="9" name="">
             <a:extLst xmlns:a="http://schemas.openxmlformats.org/drawingml/2006/main">
               <a:ext uri="{FF2B5EF4-FFF2-40B4-BE49-F238E27FC236}">
-                <a16:creationId xmlns:a16="http://schemas.microsoft.com/office/drawing/2014/main" id="{8FF72350-07A0-450A-8B04-318F397B623A}"/>
+                <a16:creationId xmlns:a16="http://schemas.microsoft.com/office/drawing/2014/main" id="{5ECD0DBF-1031-4DDF-A8E1-923DB8F64949}"/>
               </a:ext>
             </a:extLst>
           </p:cNvPr>
@@ -4554,7 +4554,7 @@
           <p:cNvPr id="10" name="">
             <a:extLst xmlns:a="http://schemas.openxmlformats.org/drawingml/2006/main">
               <a:ext uri="{FF2B5EF4-FFF2-40B4-BE49-F238E27FC236}">
-                <a16:creationId xmlns:a16="http://schemas.microsoft.com/office/drawing/2014/main" id="{A63712C7-FAD5-4F1F-9798-408D72379F5D}"/>
+                <a16:creationId xmlns:a16="http://schemas.microsoft.com/office/drawing/2014/main" id="{D2AC50A5-FBD2-4FCB-908B-37A86A9803A4}"/>
               </a:ext>
             </a:extLst>
           </p:cNvPr>
@@ -4587,7 +4587,7 @@
           <p:cNvPr id="11" name="">
             <a:extLst xmlns:a="http://schemas.openxmlformats.org/drawingml/2006/main">
               <a:ext uri="{FF2B5EF4-FFF2-40B4-BE49-F238E27FC236}">
-                <a16:creationId xmlns:a16="http://schemas.microsoft.com/office/drawing/2014/main" id="{502AC84E-4830-4499-A92D-7AF13A24BBDC}"/>
+                <a16:creationId xmlns:a16="http://schemas.microsoft.com/office/drawing/2014/main" id="{227A1495-4163-4A64-8D83-5734A49F265B}"/>
               </a:ext>
             </a:extLst>
           </p:cNvPr>
@@ -4622,7 +4622,7 @@
           <p:cNvPr id="12" name="">
             <a:extLst xmlns:a="http://schemas.openxmlformats.org/drawingml/2006/main">
               <a:ext uri="{FF2B5EF4-FFF2-40B4-BE49-F238E27FC236}">
-                <a16:creationId xmlns:a16="http://schemas.microsoft.com/office/drawing/2014/main" id="{E7AE2A07-26D7-4101-95B5-0EF3D5A867A1}"/>
+                <a16:creationId xmlns:a16="http://schemas.microsoft.com/office/drawing/2014/main" id="{455D56B4-437F-4F16-B22C-6CB5B74082B2}"/>
               </a:ext>
             </a:extLst>
           </p:cNvPr>
@@ -4680,7 +4680,7 @@
           <p:cNvPr id="13" name="">
             <a:extLst xmlns:a="http://schemas.openxmlformats.org/drawingml/2006/main">
               <a:ext uri="{FF2B5EF4-FFF2-40B4-BE49-F238E27FC236}">
-                <a16:creationId xmlns:a16="http://schemas.microsoft.com/office/drawing/2014/main" id="{E916A8E1-CB35-412B-9173-185AB4FDE99E}"/>
+                <a16:creationId xmlns:a16="http://schemas.microsoft.com/office/drawing/2014/main" id="{61D1B535-1721-4298-8F91-BDD30DE8CD8B}"/>
               </a:ext>
             </a:extLst>
           </p:cNvPr>
@@ -4755,7 +4755,7 @@
           <p:cNvPr id="14" name="">
             <a:extLst xmlns:a="http://schemas.openxmlformats.org/drawingml/2006/main">
               <a:ext uri="{FF2B5EF4-FFF2-40B4-BE49-F238E27FC236}">
-                <a16:creationId xmlns:a16="http://schemas.microsoft.com/office/drawing/2014/main" id="{4A1E6361-FC71-4E68-9175-B1647C74155E}"/>
+                <a16:creationId xmlns:a16="http://schemas.microsoft.com/office/drawing/2014/main" id="{F829FAF9-20F3-4CC2-B6C2-37EAA820D498}"/>
               </a:ext>
             </a:extLst>
           </p:cNvPr>
@@ -4788,7 +4788,7 @@
           <p:cNvPr id="15" name="">
             <a:extLst xmlns:a="http://schemas.openxmlformats.org/drawingml/2006/main">
               <a:ext uri="{FF2B5EF4-FFF2-40B4-BE49-F238E27FC236}">
-                <a16:creationId xmlns:a16="http://schemas.microsoft.com/office/drawing/2014/main" id="{14647273-A11C-40B2-A70D-B7667FC505FF}"/>
+                <a16:creationId xmlns:a16="http://schemas.microsoft.com/office/drawing/2014/main" id="{67D11A86-0458-4ABD-9E9F-C10B2BBF2E3E}"/>
               </a:ext>
             </a:extLst>
           </p:cNvPr>
@@ -4823,7 +4823,7 @@
           <p:cNvPr id="16" name="">
             <a:extLst xmlns:a="http://schemas.openxmlformats.org/drawingml/2006/main">
               <a:ext uri="{FF2B5EF4-FFF2-40B4-BE49-F238E27FC236}">
-                <a16:creationId xmlns:a16="http://schemas.microsoft.com/office/drawing/2014/main" id="{2AD4D11E-E48F-4EAA-A301-FE489B5F9858}"/>
+                <a16:creationId xmlns:a16="http://schemas.microsoft.com/office/drawing/2014/main" id="{339551C8-C03D-4766-91E1-711BBF9A19D6}"/>
               </a:ext>
             </a:extLst>
           </p:cNvPr>
@@ -4881,7 +4881,7 @@
           <p:cNvPr id="17" name="">
             <a:extLst xmlns:a="http://schemas.openxmlformats.org/drawingml/2006/main">
               <a:ext uri="{FF2B5EF4-FFF2-40B4-BE49-F238E27FC236}">
-                <a16:creationId xmlns:a16="http://schemas.microsoft.com/office/drawing/2014/main" id="{202023FD-98D7-409B-8815-C1D51AD6A905}"/>
+                <a16:creationId xmlns:a16="http://schemas.microsoft.com/office/drawing/2014/main" id="{B12353C8-81A1-4A70-ABF4-AD44CC9565BE}"/>
               </a:ext>
             </a:extLst>
           </p:cNvPr>
@@ -4956,7 +4956,7 @@
           <p:cNvPr id="18" name="">
             <a:extLst xmlns:a="http://schemas.openxmlformats.org/drawingml/2006/main">
               <a:ext uri="{FF2B5EF4-FFF2-40B4-BE49-F238E27FC236}">
-                <a16:creationId xmlns:a16="http://schemas.microsoft.com/office/drawing/2014/main" id="{6C65D7E3-B700-4EC2-B565-65F823DCDD3E}"/>
+                <a16:creationId xmlns:a16="http://schemas.microsoft.com/office/drawing/2014/main" id="{3E2CD257-DE11-4D87-9D1B-AB6EA2396DAF}"/>
               </a:ext>
             </a:extLst>
           </p:cNvPr>
@@ -4989,7 +4989,7 @@
           <p:cNvPr id="19" name="">
             <a:extLst xmlns:a="http://schemas.openxmlformats.org/drawingml/2006/main">
               <a:ext uri="{FF2B5EF4-FFF2-40B4-BE49-F238E27FC236}">
-                <a16:creationId xmlns:a16="http://schemas.microsoft.com/office/drawing/2014/main" id="{9DA4C2B1-347A-45D3-BB49-0A44F7B15049}"/>
+                <a16:creationId xmlns:a16="http://schemas.microsoft.com/office/drawing/2014/main" id="{65143392-62A3-468C-90EF-1CC24901C574}"/>
               </a:ext>
             </a:extLst>
           </p:cNvPr>
@@ -5024,7 +5024,7 @@
           <p:cNvPr id="20" name="">
             <a:extLst xmlns:a="http://schemas.openxmlformats.org/drawingml/2006/main">
               <a:ext uri="{FF2B5EF4-FFF2-40B4-BE49-F238E27FC236}">
-                <a16:creationId xmlns:a16="http://schemas.microsoft.com/office/drawing/2014/main" id="{7E360748-372C-4091-99F4-89B6C4694087}"/>
+                <a16:creationId xmlns:a16="http://schemas.microsoft.com/office/drawing/2014/main" id="{10FB8A9C-33CF-496D-9F9C-8ED585499D69}"/>
               </a:ext>
             </a:extLst>
           </p:cNvPr>
@@ -5082,7 +5082,7 @@
           <p:cNvPr id="21" name="">
             <a:extLst xmlns:a="http://schemas.openxmlformats.org/drawingml/2006/main">
               <a:ext uri="{FF2B5EF4-FFF2-40B4-BE49-F238E27FC236}">
-                <a16:creationId xmlns:a16="http://schemas.microsoft.com/office/drawing/2014/main" id="{341260AB-948F-4636-A998-E63F20D52A21}"/>
+                <a16:creationId xmlns:a16="http://schemas.microsoft.com/office/drawing/2014/main" id="{22DD1693-E436-4DE7-ABA6-E33CD5E42B82}"/>
               </a:ext>
             </a:extLst>
           </p:cNvPr>
@@ -5157,7 +5157,7 @@
           <p:cNvPr id="22" name="">
             <a:extLst xmlns:a="http://schemas.openxmlformats.org/drawingml/2006/main">
               <a:ext uri="{FF2B5EF4-FFF2-40B4-BE49-F238E27FC236}">
-                <a16:creationId xmlns:a16="http://schemas.microsoft.com/office/drawing/2014/main" id="{675C46AE-9B61-4D12-B250-58ADA517B71C}"/>
+                <a16:creationId xmlns:a16="http://schemas.microsoft.com/office/drawing/2014/main" id="{29DD297B-5360-450B-B85F-291C0040C892}"/>
               </a:ext>
             </a:extLst>
           </p:cNvPr>
@@ -5190,7 +5190,7 @@
           <p:cNvPr id="23" name="">
             <a:extLst xmlns:a="http://schemas.openxmlformats.org/drawingml/2006/main">
               <a:ext uri="{FF2B5EF4-FFF2-40B4-BE49-F238E27FC236}">
-                <a16:creationId xmlns:a16="http://schemas.microsoft.com/office/drawing/2014/main" id="{A022F5D7-8141-45CA-A0DE-DF817E7FAF75}"/>
+                <a16:creationId xmlns:a16="http://schemas.microsoft.com/office/drawing/2014/main" id="{ED27DE87-5B62-4398-B832-BDD9ABF1E9B6}"/>
               </a:ext>
             </a:extLst>
           </p:cNvPr>
@@ -5225,7 +5225,7 @@
           <p:cNvPr id="24" name="">
             <a:extLst xmlns:a="http://schemas.openxmlformats.org/drawingml/2006/main">
               <a:ext uri="{FF2B5EF4-FFF2-40B4-BE49-F238E27FC236}">
-                <a16:creationId xmlns:a16="http://schemas.microsoft.com/office/drawing/2014/main" id="{23A6078A-0310-4435-8393-9ED8BF437AB3}"/>
+                <a16:creationId xmlns:a16="http://schemas.microsoft.com/office/drawing/2014/main" id="{20DF19C1-3379-4512-A59E-8C725632BD4C}"/>
               </a:ext>
             </a:extLst>
           </p:cNvPr>
@@ -5283,7 +5283,7 @@
           <p:cNvPr id="25" name="">
             <a:extLst xmlns:a="http://schemas.openxmlformats.org/drawingml/2006/main">
               <a:ext uri="{FF2B5EF4-FFF2-40B4-BE49-F238E27FC236}">
-                <a16:creationId xmlns:a16="http://schemas.microsoft.com/office/drawing/2014/main" id="{B19B0F70-5B29-4A07-AF87-08D87AE779C7}"/>
+                <a16:creationId xmlns:a16="http://schemas.microsoft.com/office/drawing/2014/main" id="{D1F79EE4-687C-4757-B9E8-01B970E068A1}"/>
               </a:ext>
             </a:extLst>
           </p:cNvPr>
@@ -5356,7 +5356,7 @@
     </p:spTree>
     <p:extLst>
       <p:ext uri="{BB962C8B-B14F-4D97-AF65-F5344CB8AC3E}">
-        <p14:creationId xmlns:p14="http://schemas.microsoft.com/office/powerpoint/2010/main" val="1226140866"/>
+        <p14:creationId xmlns:p14="http://schemas.microsoft.com/office/powerpoint/2010/main" val="91279292"/>
       </p:ext>
     </p:extLst>
   </p:cSld>
@@ -5387,7 +5387,7 @@
           <p:cNvPr id="1" name="">
             <a:extLst xmlns:a="http://schemas.openxmlformats.org/drawingml/2006/main">
               <a:ext uri="{FF2B5EF4-FFF2-40B4-BE49-F238E27FC236}">
-                <a16:creationId xmlns:a16="http://schemas.microsoft.com/office/drawing/2014/main" id="{2CE81E0F-5CEC-4A87-8645-BE5E7DEE770E}"/>
+                <a16:creationId xmlns:a16="http://schemas.microsoft.com/office/drawing/2014/main" id="{DD395469-6CBC-4F42-8A41-F13C3CEA924D}"/>
               </a:ext>
             </a:extLst>
           </p:cNvPr>
@@ -5426,7 +5426,7 @@
           <p:nvPr/>
         </p:nvPicPr>
         <p:blipFill>
-          <a:blip xmlns:r="http://schemas.openxmlformats.org/officeDocument/2006/relationships" xmlns:a="http://schemas.openxmlformats.org/drawingml/2006/main" r:embed="R7821dae302704e58"/>
+          <a:blip xmlns:r="http://schemas.openxmlformats.org/officeDocument/2006/relationships" xmlns:a="http://schemas.openxmlformats.org/drawingml/2006/main" r:embed="Re7441c1d2d744ec9"/>
           <a:stretch xmlns:a="http://schemas.openxmlformats.org/drawingml/2006/main"/>
         </p:blipFill>
         <p:spPr>
@@ -5444,7 +5444,7 @@
           <p:cNvPr id="3" name="">
             <a:extLst xmlns:a="http://schemas.openxmlformats.org/drawingml/2006/main">
               <a:ext uri="{FF2B5EF4-FFF2-40B4-BE49-F238E27FC236}">
-                <a16:creationId xmlns:a16="http://schemas.microsoft.com/office/drawing/2014/main" id="{FD47CEBC-42C4-42CC-B5A3-CE615EE93131}"/>
+                <a16:creationId xmlns:a16="http://schemas.microsoft.com/office/drawing/2014/main" id="{1F059F46-8951-4621-B2E4-79B686413374}"/>
               </a:ext>
             </a:extLst>
           </p:cNvPr>
@@ -5482,14 +5482,14 @@
             <a:pPr algn="r">
               <a:defRPr sz="825" b="1">
                 <a:solidFill>
-                  <a:srgbClr val="0E1B3E"/>
+                  <a:srgbClr val="070F26"/>
                 </a:solidFill>
               </a:defRPr>
             </a:pPr>
             <a:r>
               <a:rPr sz="825" b="1">
                 <a:solidFill>
-                  <a:srgbClr val="0E1B3E"/>
+                  <a:srgbClr val="070F26"/>
                 </a:solidFill>
               </a:rPr>
               <a:t>NTT DATA UNIVERSITY</a:t>
@@ -5502,7 +5502,7 @@
           <p:cNvPr id="4" name="">
             <a:extLst xmlns:a="http://schemas.openxmlformats.org/drawingml/2006/main">
               <a:ext uri="{FF2B5EF4-FFF2-40B4-BE49-F238E27FC236}">
-                <a16:creationId xmlns:a16="http://schemas.microsoft.com/office/drawing/2014/main" id="{710213B5-8717-45FB-A714-BEDA7B4D39CE}"/>
+                <a16:creationId xmlns:a16="http://schemas.microsoft.com/office/drawing/2014/main" id="{9CB3715C-0C54-43AE-B0EE-35B0FF034249}"/>
               </a:ext>
             </a:extLst>
           </p:cNvPr>
@@ -5560,7 +5560,7 @@
           <p:cNvPr id="5" name="">
             <a:extLst xmlns:a="http://schemas.openxmlformats.org/drawingml/2006/main">
               <a:ext uri="{FF2B5EF4-FFF2-40B4-BE49-F238E27FC236}">
-                <a16:creationId xmlns:a16="http://schemas.microsoft.com/office/drawing/2014/main" id="{780C67D4-1C0C-4705-AB9D-DB4EB541ECB5}"/>
+                <a16:creationId xmlns:a16="http://schemas.microsoft.com/office/drawing/2014/main" id="{0CB89F46-0FBE-46D2-8731-6E56531914CE}"/>
               </a:ext>
             </a:extLst>
           </p:cNvPr>
@@ -5618,7 +5618,7 @@
           <p:cNvPr id="6" name="">
             <a:extLst xmlns:a="http://schemas.openxmlformats.org/drawingml/2006/main">
               <a:ext uri="{FF2B5EF4-FFF2-40B4-BE49-F238E27FC236}">
-                <a16:creationId xmlns:a16="http://schemas.microsoft.com/office/drawing/2014/main" id="{F564F7C8-14F9-4FF9-A582-CE5668E64006}"/>
+                <a16:creationId xmlns:a16="http://schemas.microsoft.com/office/drawing/2014/main" id="{DF3F847B-CF94-4031-A4CF-B419ECA3DEC4}"/>
               </a:ext>
             </a:extLst>
           </p:cNvPr>
@@ -5656,14 +5656,14 @@
             <a:pPr algn="r">
               <a:defRPr sz="675" b="1">
                 <a:solidFill>
-                  <a:srgbClr val="0E1B3E"/>
+                  <a:srgbClr val="070F26"/>
                 </a:solidFill>
               </a:defRPr>
             </a:pPr>
             <a:r>
               <a:rPr sz="675" b="1">
                 <a:solidFill>
-                  <a:srgbClr val="0E1B3E"/>
+                  <a:srgbClr val="070F26"/>
                 </a:solidFill>
               </a:rPr>
               <a:t>NTT DATA UNIVERSITY</a:t>
@@ -5676,7 +5676,7 @@
           <p:cNvPr id="7" name="">
             <a:extLst xmlns:a="http://schemas.openxmlformats.org/drawingml/2006/main">
               <a:ext uri="{FF2B5EF4-FFF2-40B4-BE49-F238E27FC236}">
-                <a16:creationId xmlns:a16="http://schemas.microsoft.com/office/drawing/2014/main" id="{EBE1EA1B-1D31-43CE-A467-80E53DBE888E}"/>
+                <a16:creationId xmlns:a16="http://schemas.microsoft.com/office/drawing/2014/main" id="{1A7521BB-9051-42F8-A775-D4289AC9A3C1}"/>
               </a:ext>
             </a:extLst>
           </p:cNvPr>
@@ -5734,7 +5734,7 @@
           <p:cNvPr id="8" name="">
             <a:extLst xmlns:a="http://schemas.openxmlformats.org/drawingml/2006/main">
               <a:ext uri="{FF2B5EF4-FFF2-40B4-BE49-F238E27FC236}">
-                <a16:creationId xmlns:a16="http://schemas.microsoft.com/office/drawing/2014/main" id="{EB384D0A-29AE-4E1F-92EB-9C01E5F68AEE}"/>
+                <a16:creationId xmlns:a16="http://schemas.microsoft.com/office/drawing/2014/main" id="{2BC9861D-2A21-4F7F-9CBA-3FD7748F5E4E}"/>
               </a:ext>
             </a:extLst>
           </p:cNvPr>
@@ -5772,14 +5772,14 @@
             <a:pPr algn="l">
               <a:defRPr sz="2400" b="0">
                 <a:solidFill>
-                  <a:srgbClr val="0E1B3E"/>
+                  <a:srgbClr val="070F26"/>
                 </a:solidFill>
               </a:defRPr>
             </a:pPr>
             <a:r>
               <a:rPr sz="2400" b="0">
                 <a:solidFill>
-                  <a:srgbClr val="0E1B3E"/>
+                  <a:srgbClr val="070F26"/>
                 </a:solidFill>
               </a:rPr>
               <a:t>Módulo 8 — Qualidade e Observabilidade</a:t>
@@ -5792,7 +5792,7 @@
           <p:cNvPr id="9" name="">
             <a:extLst xmlns:a="http://schemas.openxmlformats.org/drawingml/2006/main">
               <a:ext uri="{FF2B5EF4-FFF2-40B4-BE49-F238E27FC236}">
-                <a16:creationId xmlns:a16="http://schemas.microsoft.com/office/drawing/2014/main" id="{9E73023C-0FD0-422E-A43F-3C1DA40A6D94}"/>
+                <a16:creationId xmlns:a16="http://schemas.microsoft.com/office/drawing/2014/main" id="{011DDC6F-AC55-4378-A1C7-8813842C79B8}"/>
               </a:ext>
             </a:extLst>
           </p:cNvPr>
@@ -5850,7 +5850,7 @@
           <p:cNvPr id="10" name="">
             <a:extLst xmlns:a="http://schemas.openxmlformats.org/drawingml/2006/main">
               <a:ext uri="{FF2B5EF4-FFF2-40B4-BE49-F238E27FC236}">
-                <a16:creationId xmlns:a16="http://schemas.microsoft.com/office/drawing/2014/main" id="{5D3A7C7B-0BD9-4A8C-BC32-DFD256EED6DC}"/>
+                <a16:creationId xmlns:a16="http://schemas.microsoft.com/office/drawing/2014/main" id="{8CEE49F9-7163-48AC-975A-5972845609D3}"/>
               </a:ext>
             </a:extLst>
           </p:cNvPr>
@@ -5883,7 +5883,7 @@
           <p:cNvPr id="11" name="">
             <a:extLst xmlns:a="http://schemas.openxmlformats.org/drawingml/2006/main">
               <a:ext uri="{FF2B5EF4-FFF2-40B4-BE49-F238E27FC236}">
-                <a16:creationId xmlns:a16="http://schemas.microsoft.com/office/drawing/2014/main" id="{96AA88E7-4A78-43BB-AF4A-8318CD44009A}"/>
+                <a16:creationId xmlns:a16="http://schemas.microsoft.com/office/drawing/2014/main" id="{1AD94B01-4454-4AFA-963E-4545244606E0}"/>
               </a:ext>
             </a:extLst>
           </p:cNvPr>
@@ -5918,7 +5918,7 @@
           <p:cNvPr id="12" name="">
             <a:extLst xmlns:a="http://schemas.openxmlformats.org/drawingml/2006/main">
               <a:ext uri="{FF2B5EF4-FFF2-40B4-BE49-F238E27FC236}">
-                <a16:creationId xmlns:a16="http://schemas.microsoft.com/office/drawing/2014/main" id="{F5782656-D5CF-4634-8F0E-31DA06CE0119}"/>
+                <a16:creationId xmlns:a16="http://schemas.microsoft.com/office/drawing/2014/main" id="{75DC241A-B356-41C9-A2DD-62C50E2604B3}"/>
               </a:ext>
             </a:extLst>
           </p:cNvPr>
@@ -5976,7 +5976,7 @@
           <p:cNvPr id="13" name="">
             <a:extLst xmlns:a="http://schemas.openxmlformats.org/drawingml/2006/main">
               <a:ext uri="{FF2B5EF4-FFF2-40B4-BE49-F238E27FC236}">
-                <a16:creationId xmlns:a16="http://schemas.microsoft.com/office/drawing/2014/main" id="{97AE7D34-9907-4A55-B94C-1786C2DEA1AF}"/>
+                <a16:creationId xmlns:a16="http://schemas.microsoft.com/office/drawing/2014/main" id="{C4A70730-21F5-4067-8A18-9062E580B89E}"/>
               </a:ext>
             </a:extLst>
           </p:cNvPr>
@@ -6068,7 +6068,7 @@
           <p:cNvPr id="14" name="">
             <a:extLst xmlns:a="http://schemas.openxmlformats.org/drawingml/2006/main">
               <a:ext uri="{FF2B5EF4-FFF2-40B4-BE49-F238E27FC236}">
-                <a16:creationId xmlns:a16="http://schemas.microsoft.com/office/drawing/2014/main" id="{5CC4F30B-6FE3-4644-933C-1272ED1C31A8}"/>
+                <a16:creationId xmlns:a16="http://schemas.microsoft.com/office/drawing/2014/main" id="{8B84BDD5-55E8-4CB3-A411-184F67F5B6AE}"/>
               </a:ext>
             </a:extLst>
           </p:cNvPr>
@@ -6101,7 +6101,7 @@
           <p:cNvPr id="15" name="">
             <a:extLst xmlns:a="http://schemas.openxmlformats.org/drawingml/2006/main">
               <a:ext uri="{FF2B5EF4-FFF2-40B4-BE49-F238E27FC236}">
-                <a16:creationId xmlns:a16="http://schemas.microsoft.com/office/drawing/2014/main" id="{A9236377-A917-40B3-B5ED-7F328A705E4F}"/>
+                <a16:creationId xmlns:a16="http://schemas.microsoft.com/office/drawing/2014/main" id="{A5C10A01-04A6-4D74-B575-56F2C854BAD3}"/>
               </a:ext>
             </a:extLst>
           </p:cNvPr>
@@ -6136,7 +6136,7 @@
           <p:cNvPr id="16" name="">
             <a:extLst xmlns:a="http://schemas.openxmlformats.org/drawingml/2006/main">
               <a:ext uri="{FF2B5EF4-FFF2-40B4-BE49-F238E27FC236}">
-                <a16:creationId xmlns:a16="http://schemas.microsoft.com/office/drawing/2014/main" id="{921BA60A-725A-4397-A608-FF3156B705B5}"/>
+                <a16:creationId xmlns:a16="http://schemas.microsoft.com/office/drawing/2014/main" id="{965484F4-FAF2-4095-BD38-D032D3FE0C8B}"/>
               </a:ext>
             </a:extLst>
           </p:cNvPr>
@@ -6194,7 +6194,7 @@
           <p:cNvPr id="17" name="">
             <a:extLst xmlns:a="http://schemas.openxmlformats.org/drawingml/2006/main">
               <a:ext uri="{FF2B5EF4-FFF2-40B4-BE49-F238E27FC236}">
-                <a16:creationId xmlns:a16="http://schemas.microsoft.com/office/drawing/2014/main" id="{2730A07D-2FF7-4B12-BE6F-B4EF4905B266}"/>
+                <a16:creationId xmlns:a16="http://schemas.microsoft.com/office/drawing/2014/main" id="{B01D5D96-608C-4046-8072-3D309E0AA7BD}"/>
               </a:ext>
             </a:extLst>
           </p:cNvPr>
@@ -6286,7 +6286,7 @@
           <p:cNvPr id="18" name="">
             <a:extLst xmlns:a="http://schemas.openxmlformats.org/drawingml/2006/main">
               <a:ext uri="{FF2B5EF4-FFF2-40B4-BE49-F238E27FC236}">
-                <a16:creationId xmlns:a16="http://schemas.microsoft.com/office/drawing/2014/main" id="{D438EC35-0BF1-4429-BF27-30320F6E25EF}"/>
+                <a16:creationId xmlns:a16="http://schemas.microsoft.com/office/drawing/2014/main" id="{5453C2A4-D607-439A-9875-E4AB49448F62}"/>
               </a:ext>
             </a:extLst>
           </p:cNvPr>
@@ -6319,7 +6319,7 @@
           <p:cNvPr id="19" name="">
             <a:extLst xmlns:a="http://schemas.openxmlformats.org/drawingml/2006/main">
               <a:ext uri="{FF2B5EF4-FFF2-40B4-BE49-F238E27FC236}">
-                <a16:creationId xmlns:a16="http://schemas.microsoft.com/office/drawing/2014/main" id="{62F3203C-9CC5-447A-B501-B078A93E0394}"/>
+                <a16:creationId xmlns:a16="http://schemas.microsoft.com/office/drawing/2014/main" id="{B48D5F30-5DC8-4472-B6D5-347E72047B15}"/>
               </a:ext>
             </a:extLst>
           </p:cNvPr>
@@ -6354,7 +6354,7 @@
           <p:cNvPr id="20" name="">
             <a:extLst xmlns:a="http://schemas.openxmlformats.org/drawingml/2006/main">
               <a:ext uri="{FF2B5EF4-FFF2-40B4-BE49-F238E27FC236}">
-                <a16:creationId xmlns:a16="http://schemas.microsoft.com/office/drawing/2014/main" id="{A2220176-A5A6-413A-9016-29C1D0A7A831}"/>
+                <a16:creationId xmlns:a16="http://schemas.microsoft.com/office/drawing/2014/main" id="{DD7C4DD1-CFEA-43CC-8688-E1E1D73C9B6D}"/>
               </a:ext>
             </a:extLst>
           </p:cNvPr>
@@ -6412,7 +6412,7 @@
           <p:cNvPr id="21" name="">
             <a:extLst xmlns:a="http://schemas.openxmlformats.org/drawingml/2006/main">
               <a:ext uri="{FF2B5EF4-FFF2-40B4-BE49-F238E27FC236}">
-                <a16:creationId xmlns:a16="http://schemas.microsoft.com/office/drawing/2014/main" id="{D6DFD5A5-6B96-4ECB-AC27-85E40BB35E6E}"/>
+                <a16:creationId xmlns:a16="http://schemas.microsoft.com/office/drawing/2014/main" id="{6929171F-7101-483C-B262-D8A6F77925DC}"/>
               </a:ext>
             </a:extLst>
           </p:cNvPr>
@@ -6502,7 +6502,7 @@
     </p:spTree>
     <p:extLst>
       <p:ext uri="{BB962C8B-B14F-4D97-AF65-F5344CB8AC3E}">
-        <p14:creationId xmlns:p14="http://schemas.microsoft.com/office/powerpoint/2010/main" val="595160107"/>
+        <p14:creationId xmlns:p14="http://schemas.microsoft.com/office/powerpoint/2010/main" val="348505808"/>
       </p:ext>
     </p:extLst>
   </p:cSld>
@@ -6515,7 +6515,7 @@
     <p:bg>
       <p:bgPr>
         <a:solidFill xmlns:a="http://schemas.openxmlformats.org/drawingml/2006/main">
-          <a:srgbClr val="0E1B3E"/>
+          <a:srgbClr val="070F26"/>
         </a:solidFill>
       </p:bgPr>
     </p:bg>
@@ -6533,7 +6533,7 @@
           <p:cNvPr id="1" name="">
             <a:extLst xmlns:a="http://schemas.openxmlformats.org/drawingml/2006/main">
               <a:ext uri="{FF2B5EF4-FFF2-40B4-BE49-F238E27FC236}">
-                <a16:creationId xmlns:a16="http://schemas.microsoft.com/office/drawing/2014/main" id="{76253A70-EF2F-4A59-A06E-8A6D3E8C5BC0}"/>
+                <a16:creationId xmlns:a16="http://schemas.microsoft.com/office/drawing/2014/main" id="{03B5199A-7101-4FF9-BAF9-555FEBC2B9B9}"/>
               </a:ext>
             </a:extLst>
           </p:cNvPr>
@@ -6551,7 +6551,7 @@
             <a:avLst/>
           </a:prstGeom>
           <a:solidFill xmlns:a="http://schemas.openxmlformats.org/drawingml/2006/main">
-            <a:srgbClr val="0E1B3E"/>
+            <a:srgbClr val="070F26"/>
           </a:solidFill>
           <a:ln xmlns:a="http://schemas.openxmlformats.org/drawingml/2006/main" w="0">
             <a:solidFill>
@@ -6572,7 +6572,7 @@
           <p:nvPr/>
         </p:nvPicPr>
         <p:blipFill>
-          <a:blip xmlns:r="http://schemas.openxmlformats.org/officeDocument/2006/relationships" xmlns:a="http://schemas.openxmlformats.org/drawingml/2006/main" r:embed="R373db7ccaae344e9"/>
+          <a:blip xmlns:r="http://schemas.openxmlformats.org/officeDocument/2006/relationships" xmlns:a="http://schemas.openxmlformats.org/drawingml/2006/main" r:embed="R84b90a3307c545f8"/>
           <a:stretch xmlns:a="http://schemas.openxmlformats.org/drawingml/2006/main"/>
         </p:blipFill>
         <p:spPr>
@@ -6590,7 +6590,7 @@
           <p:cNvPr id="3" name="">
             <a:extLst xmlns:a="http://schemas.openxmlformats.org/drawingml/2006/main">
               <a:ext uri="{FF2B5EF4-FFF2-40B4-BE49-F238E27FC236}">
-                <a16:creationId xmlns:a16="http://schemas.microsoft.com/office/drawing/2014/main" id="{4D7E9A2C-3F93-49B5-8047-EC4B27A5A5E1}"/>
+                <a16:creationId xmlns:a16="http://schemas.microsoft.com/office/drawing/2014/main" id="{8B8293AD-AF78-49D0-B172-081F7BABC5FF}"/>
               </a:ext>
             </a:extLst>
           </p:cNvPr>
@@ -6648,7 +6648,7 @@
           <p:cNvPr id="4" name="">
             <a:extLst xmlns:a="http://schemas.openxmlformats.org/drawingml/2006/main">
               <a:ext uri="{FF2B5EF4-FFF2-40B4-BE49-F238E27FC236}">
-                <a16:creationId xmlns:a16="http://schemas.microsoft.com/office/drawing/2014/main" id="{A1E1F63F-84AC-441C-B4A9-54D5E61E6637}"/>
+                <a16:creationId xmlns:a16="http://schemas.microsoft.com/office/drawing/2014/main" id="{02E3F901-9CB3-4271-9DA0-0115638A12BE}"/>
               </a:ext>
             </a:extLst>
           </p:cNvPr>
@@ -6706,7 +6706,7 @@
           <p:cNvPr id="5" name="">
             <a:extLst xmlns:a="http://schemas.openxmlformats.org/drawingml/2006/main">
               <a:ext uri="{FF2B5EF4-FFF2-40B4-BE49-F238E27FC236}">
-                <a16:creationId xmlns:a16="http://schemas.microsoft.com/office/drawing/2014/main" id="{B69F49AA-1E17-466B-B016-31FCC39CB54A}"/>
+                <a16:creationId xmlns:a16="http://schemas.microsoft.com/office/drawing/2014/main" id="{AA42E5CE-C1FC-404D-9CA3-E28E71BA0896}"/>
               </a:ext>
             </a:extLst>
           </p:cNvPr>
@@ -6768,7 +6768,7 @@
           <p:nvPr/>
         </p:nvPicPr>
         <p:blipFill>
-          <a:blip xmlns:r="http://schemas.openxmlformats.org/officeDocument/2006/relationships" xmlns:a="http://schemas.openxmlformats.org/drawingml/2006/main" r:embed="R912884c636b24ce8"/>
+          <a:blip xmlns:r="http://schemas.openxmlformats.org/officeDocument/2006/relationships" xmlns:a="http://schemas.openxmlformats.org/drawingml/2006/main" r:embed="Rf5a914766d0743ab"/>
           <a:stretch xmlns:a="http://schemas.openxmlformats.org/drawingml/2006/main"/>
         </p:blipFill>
         <p:spPr>
@@ -6786,7 +6786,7 @@
           <p:cNvPr id="7" name="">
             <a:extLst xmlns:a="http://schemas.openxmlformats.org/drawingml/2006/main">
               <a:ext uri="{FF2B5EF4-FFF2-40B4-BE49-F238E27FC236}">
-                <a16:creationId xmlns:a16="http://schemas.microsoft.com/office/drawing/2014/main" id="{1C003169-7CF3-4C48-AA72-16315735366B}"/>
+                <a16:creationId xmlns:a16="http://schemas.microsoft.com/office/drawing/2014/main" id="{4849227F-9540-4B60-895C-3F108F1F6B05}"/>
               </a:ext>
             </a:extLst>
           </p:cNvPr>
@@ -6844,7 +6844,7 @@
           <p:cNvPr id="8" name="">
             <a:extLst xmlns:a="http://schemas.openxmlformats.org/drawingml/2006/main">
               <a:ext uri="{FF2B5EF4-FFF2-40B4-BE49-F238E27FC236}">
-                <a16:creationId xmlns:a16="http://schemas.microsoft.com/office/drawing/2014/main" id="{3BE40C29-D51E-46B4-AD90-24B91B192F14}"/>
+                <a16:creationId xmlns:a16="http://schemas.microsoft.com/office/drawing/2014/main" id="{D0F6CF07-6DD7-44B7-B363-8138CFC19923}"/>
               </a:ext>
             </a:extLst>
           </p:cNvPr>
@@ -6900,7 +6900,7 @@
     </p:spTree>
     <p:extLst>
       <p:ext uri="{BB962C8B-B14F-4D97-AF65-F5344CB8AC3E}">
-        <p14:creationId xmlns:p14="http://schemas.microsoft.com/office/powerpoint/2010/main" val="660019098"/>
+        <p14:creationId xmlns:p14="http://schemas.microsoft.com/office/powerpoint/2010/main" val="1702246120"/>
       </p:ext>
     </p:extLst>
   </p:cSld>
@@ -6931,7 +6931,7 @@
           <p:cNvPr id="1" name="">
             <a:extLst xmlns:a="http://schemas.openxmlformats.org/drawingml/2006/main">
               <a:ext uri="{FF2B5EF4-FFF2-40B4-BE49-F238E27FC236}">
-                <a16:creationId xmlns:a16="http://schemas.microsoft.com/office/drawing/2014/main" id="{2CD33644-4163-4103-AB5C-6101C674D73C}"/>
+                <a16:creationId xmlns:a16="http://schemas.microsoft.com/office/drawing/2014/main" id="{E7B19BBB-8454-4C62-A614-3685A995C406}"/>
               </a:ext>
             </a:extLst>
           </p:cNvPr>
@@ -6970,7 +6970,7 @@
           <p:nvPr/>
         </p:nvPicPr>
         <p:blipFill>
-          <a:blip xmlns:r="http://schemas.openxmlformats.org/officeDocument/2006/relationships" xmlns:a="http://schemas.openxmlformats.org/drawingml/2006/main" r:embed="R17c27c0e79464463"/>
+          <a:blip xmlns:r="http://schemas.openxmlformats.org/officeDocument/2006/relationships" xmlns:a="http://schemas.openxmlformats.org/drawingml/2006/main" r:embed="R61bf76ea82a14db7"/>
           <a:stretch xmlns:a="http://schemas.openxmlformats.org/drawingml/2006/main"/>
         </p:blipFill>
         <p:spPr>
@@ -6988,7 +6988,7 @@
           <p:cNvPr id="3" name="">
             <a:extLst xmlns:a="http://schemas.openxmlformats.org/drawingml/2006/main">
               <a:ext uri="{FF2B5EF4-FFF2-40B4-BE49-F238E27FC236}">
-                <a16:creationId xmlns:a16="http://schemas.microsoft.com/office/drawing/2014/main" id="{470D4387-F819-4B22-8443-EA60CB77353D}"/>
+                <a16:creationId xmlns:a16="http://schemas.microsoft.com/office/drawing/2014/main" id="{D79AB2D3-32BC-4C93-9F70-72ADBE2BF3E8}"/>
               </a:ext>
             </a:extLst>
           </p:cNvPr>
@@ -7026,14 +7026,14 @@
             <a:pPr algn="r">
               <a:defRPr sz="825" b="1">
                 <a:solidFill>
-                  <a:srgbClr val="0E1B3E"/>
+                  <a:srgbClr val="070F26"/>
                 </a:solidFill>
               </a:defRPr>
             </a:pPr>
             <a:r>
               <a:rPr sz="825" b="1">
                 <a:solidFill>
-                  <a:srgbClr val="0E1B3E"/>
+                  <a:srgbClr val="070F26"/>
                 </a:solidFill>
               </a:rPr>
               <a:t>NTT DATA UNIVERSITY</a:t>
@@ -7046,7 +7046,7 @@
           <p:cNvPr id="4" name="">
             <a:extLst xmlns:a="http://schemas.openxmlformats.org/drawingml/2006/main">
               <a:ext uri="{FF2B5EF4-FFF2-40B4-BE49-F238E27FC236}">
-                <a16:creationId xmlns:a16="http://schemas.microsoft.com/office/drawing/2014/main" id="{995EC1BF-EF59-4542-B4A7-0B70B5995E3F}"/>
+                <a16:creationId xmlns:a16="http://schemas.microsoft.com/office/drawing/2014/main" id="{B420B9FE-385F-49E6-AEBE-4AFFA6F974E2}"/>
               </a:ext>
             </a:extLst>
           </p:cNvPr>
@@ -7104,7 +7104,7 @@
           <p:cNvPr id="5" name="">
             <a:extLst xmlns:a="http://schemas.openxmlformats.org/drawingml/2006/main">
               <a:ext uri="{FF2B5EF4-FFF2-40B4-BE49-F238E27FC236}">
-                <a16:creationId xmlns:a16="http://schemas.microsoft.com/office/drawing/2014/main" id="{4A5FEF94-A03C-4882-B54A-686E0C4E5ED7}"/>
+                <a16:creationId xmlns:a16="http://schemas.microsoft.com/office/drawing/2014/main" id="{4D00047B-38BB-4A63-A132-F4DCB78504DF}"/>
               </a:ext>
             </a:extLst>
           </p:cNvPr>
@@ -7162,7 +7162,7 @@
           <p:cNvPr id="6" name="">
             <a:extLst xmlns:a="http://schemas.openxmlformats.org/drawingml/2006/main">
               <a:ext uri="{FF2B5EF4-FFF2-40B4-BE49-F238E27FC236}">
-                <a16:creationId xmlns:a16="http://schemas.microsoft.com/office/drawing/2014/main" id="{B9700511-DBF9-46C9-9BFE-532F452ED83A}"/>
+                <a16:creationId xmlns:a16="http://schemas.microsoft.com/office/drawing/2014/main" id="{3B9E6D3D-150E-4485-A059-A8E2AB1E6453}"/>
               </a:ext>
             </a:extLst>
           </p:cNvPr>
@@ -7200,14 +7200,14 @@
             <a:pPr algn="r">
               <a:defRPr sz="675" b="1">
                 <a:solidFill>
-                  <a:srgbClr val="0E1B3E"/>
+                  <a:srgbClr val="070F26"/>
                 </a:solidFill>
               </a:defRPr>
             </a:pPr>
             <a:r>
               <a:rPr sz="675" b="1">
                 <a:solidFill>
-                  <a:srgbClr val="0E1B3E"/>
+                  <a:srgbClr val="070F26"/>
                 </a:solidFill>
               </a:rPr>
               <a:t>NTT DATA UNIVERSITY</a:t>
@@ -7220,7 +7220,7 @@
           <p:cNvPr id="7" name="">
             <a:extLst xmlns:a="http://schemas.openxmlformats.org/drawingml/2006/main">
               <a:ext uri="{FF2B5EF4-FFF2-40B4-BE49-F238E27FC236}">
-                <a16:creationId xmlns:a16="http://schemas.microsoft.com/office/drawing/2014/main" id="{14D77CAB-40CF-49E5-855E-E32B3AB14825}"/>
+                <a16:creationId xmlns:a16="http://schemas.microsoft.com/office/drawing/2014/main" id="{0E66519F-8661-4A33-B41C-D5DB92ED7569}"/>
               </a:ext>
             </a:extLst>
           </p:cNvPr>
@@ -7278,7 +7278,7 @@
           <p:cNvPr id="8" name="">
             <a:extLst xmlns:a="http://schemas.openxmlformats.org/drawingml/2006/main">
               <a:ext uri="{FF2B5EF4-FFF2-40B4-BE49-F238E27FC236}">
-                <a16:creationId xmlns:a16="http://schemas.microsoft.com/office/drawing/2014/main" id="{0AA34F01-9F57-44A3-A181-5A54A67BA111}"/>
+                <a16:creationId xmlns:a16="http://schemas.microsoft.com/office/drawing/2014/main" id="{B4CEA7ED-74EB-45EE-A4FA-4631B09D8290}"/>
               </a:ext>
             </a:extLst>
           </p:cNvPr>
@@ -7316,14 +7316,14 @@
             <a:pPr algn="l">
               <a:defRPr sz="2400" b="0">
                 <a:solidFill>
-                  <a:srgbClr val="0E1B3E"/>
+                  <a:srgbClr val="070F26"/>
                 </a:solidFill>
               </a:defRPr>
             </a:pPr>
             <a:r>
               <a:rPr sz="2400" b="0">
                 <a:solidFill>
-                  <a:srgbClr val="0E1B3E"/>
+                  <a:srgbClr val="070F26"/>
                 </a:solidFill>
               </a:rPr>
               <a:t>Onde os dados vivem — e o que muda quando crescem</a:t>
@@ -7336,7 +7336,7 @@
           <p:cNvPr id="9" name="">
             <a:extLst xmlns:a="http://schemas.openxmlformats.org/drawingml/2006/main">
               <a:ext uri="{FF2B5EF4-FFF2-40B4-BE49-F238E27FC236}">
-                <a16:creationId xmlns:a16="http://schemas.microsoft.com/office/drawing/2014/main" id="{E36DBCEF-0F3C-467E-987C-3005E3C57D40}"/>
+                <a16:creationId xmlns:a16="http://schemas.microsoft.com/office/drawing/2014/main" id="{E81DB265-A586-4B86-8047-D631091E8C63}"/>
               </a:ext>
             </a:extLst>
           </p:cNvPr>
@@ -7394,7 +7394,7 @@
           <p:cNvPr id="10" name="">
             <a:extLst xmlns:a="http://schemas.openxmlformats.org/drawingml/2006/main">
               <a:ext uri="{FF2B5EF4-FFF2-40B4-BE49-F238E27FC236}">
-                <a16:creationId xmlns:a16="http://schemas.microsoft.com/office/drawing/2014/main" id="{5F76413F-66E8-4F12-8FD1-166623749C3A}"/>
+                <a16:creationId xmlns:a16="http://schemas.microsoft.com/office/drawing/2014/main" id="{86362C64-100E-443B-8397-61969971BC39}"/>
               </a:ext>
             </a:extLst>
           </p:cNvPr>
@@ -7427,7 +7427,7 @@
           <p:cNvPr id="11" name="">
             <a:extLst xmlns:a="http://schemas.openxmlformats.org/drawingml/2006/main">
               <a:ext uri="{FF2B5EF4-FFF2-40B4-BE49-F238E27FC236}">
-                <a16:creationId xmlns:a16="http://schemas.microsoft.com/office/drawing/2014/main" id="{2FA4E3CA-0F13-43CB-9496-230E4A5907A3}"/>
+                <a16:creationId xmlns:a16="http://schemas.microsoft.com/office/drawing/2014/main" id="{4C44E0FA-C662-428F-AD22-83D4D0769EC0}"/>
               </a:ext>
             </a:extLst>
           </p:cNvPr>
@@ -7462,7 +7462,7 @@
           <p:cNvPr id="12" name="">
             <a:extLst xmlns:a="http://schemas.openxmlformats.org/drawingml/2006/main">
               <a:ext uri="{FF2B5EF4-FFF2-40B4-BE49-F238E27FC236}">
-                <a16:creationId xmlns:a16="http://schemas.microsoft.com/office/drawing/2014/main" id="{D1B3F1CB-CAD0-4816-AE60-197FB601999C}"/>
+                <a16:creationId xmlns:a16="http://schemas.microsoft.com/office/drawing/2014/main" id="{546F1C49-A853-439F-8A8C-93083E61D728}"/>
               </a:ext>
             </a:extLst>
           </p:cNvPr>
@@ -7520,7 +7520,7 @@
           <p:cNvPr id="13" name="">
             <a:extLst xmlns:a="http://schemas.openxmlformats.org/drawingml/2006/main">
               <a:ext uri="{FF2B5EF4-FFF2-40B4-BE49-F238E27FC236}">
-                <a16:creationId xmlns:a16="http://schemas.microsoft.com/office/drawing/2014/main" id="{62AC3FC5-A037-4783-82E8-A3F813BF0AD7}"/>
+                <a16:creationId xmlns:a16="http://schemas.microsoft.com/office/drawing/2014/main" id="{57ECD801-32BA-4A82-AE3E-24510003CC8E}"/>
               </a:ext>
             </a:extLst>
           </p:cNvPr>
@@ -7612,7 +7612,7 @@
           <p:cNvPr id="14" name="">
             <a:extLst xmlns:a="http://schemas.openxmlformats.org/drawingml/2006/main">
               <a:ext uri="{FF2B5EF4-FFF2-40B4-BE49-F238E27FC236}">
-                <a16:creationId xmlns:a16="http://schemas.microsoft.com/office/drawing/2014/main" id="{665DFF1F-629F-459E-B4D2-BF0AEF3BEB2C}"/>
+                <a16:creationId xmlns:a16="http://schemas.microsoft.com/office/drawing/2014/main" id="{0D8588A3-87A9-4338-98A6-54D1F074E27B}"/>
               </a:ext>
             </a:extLst>
           </p:cNvPr>
@@ -7645,7 +7645,7 @@
           <p:cNvPr id="15" name="">
             <a:extLst xmlns:a="http://schemas.openxmlformats.org/drawingml/2006/main">
               <a:ext uri="{FF2B5EF4-FFF2-40B4-BE49-F238E27FC236}">
-                <a16:creationId xmlns:a16="http://schemas.microsoft.com/office/drawing/2014/main" id="{7886438B-9217-4722-8D45-A2457D991263}"/>
+                <a16:creationId xmlns:a16="http://schemas.microsoft.com/office/drawing/2014/main" id="{66D6516F-A156-4BCF-9871-3525CEBA6BE3}"/>
               </a:ext>
             </a:extLst>
           </p:cNvPr>
@@ -7680,7 +7680,7 @@
           <p:cNvPr id="16" name="">
             <a:extLst xmlns:a="http://schemas.openxmlformats.org/drawingml/2006/main">
               <a:ext uri="{FF2B5EF4-FFF2-40B4-BE49-F238E27FC236}">
-                <a16:creationId xmlns:a16="http://schemas.microsoft.com/office/drawing/2014/main" id="{A0662F73-6588-46F3-A4F4-94FD3F9864E7}"/>
+                <a16:creationId xmlns:a16="http://schemas.microsoft.com/office/drawing/2014/main" id="{DDB5CD73-A094-4548-9BC4-16FB2AC849DE}"/>
               </a:ext>
             </a:extLst>
           </p:cNvPr>
@@ -7738,7 +7738,7 @@
           <p:cNvPr id="17" name="">
             <a:extLst xmlns:a="http://schemas.openxmlformats.org/drawingml/2006/main">
               <a:ext uri="{FF2B5EF4-FFF2-40B4-BE49-F238E27FC236}">
-                <a16:creationId xmlns:a16="http://schemas.microsoft.com/office/drawing/2014/main" id="{D2470668-E8B0-4AD9-B991-B3AE6FD11E86}"/>
+                <a16:creationId xmlns:a16="http://schemas.microsoft.com/office/drawing/2014/main" id="{9A711F21-BBF5-490E-BA55-713DE7702B56}"/>
               </a:ext>
             </a:extLst>
           </p:cNvPr>
@@ -7830,7 +7830,7 @@
           <p:cNvPr id="18" name="">
             <a:extLst xmlns:a="http://schemas.openxmlformats.org/drawingml/2006/main">
               <a:ext uri="{FF2B5EF4-FFF2-40B4-BE49-F238E27FC236}">
-                <a16:creationId xmlns:a16="http://schemas.microsoft.com/office/drawing/2014/main" id="{D97E915E-3E15-4525-9EBC-41A425F3A62B}"/>
+                <a16:creationId xmlns:a16="http://schemas.microsoft.com/office/drawing/2014/main" id="{2AC3ED74-890D-42C4-BFF4-E95D5B34E805}"/>
               </a:ext>
             </a:extLst>
           </p:cNvPr>
@@ -7863,7 +7863,7 @@
           <p:cNvPr id="19" name="">
             <a:extLst xmlns:a="http://schemas.openxmlformats.org/drawingml/2006/main">
               <a:ext uri="{FF2B5EF4-FFF2-40B4-BE49-F238E27FC236}">
-                <a16:creationId xmlns:a16="http://schemas.microsoft.com/office/drawing/2014/main" id="{7FC7F3BF-547F-4B11-AC70-8C3412AA3482}"/>
+                <a16:creationId xmlns:a16="http://schemas.microsoft.com/office/drawing/2014/main" id="{E189E01B-5E3F-41EE-B212-6A10B4113F6C}"/>
               </a:ext>
             </a:extLst>
           </p:cNvPr>
@@ -7898,7 +7898,7 @@
           <p:cNvPr id="20" name="">
             <a:extLst xmlns:a="http://schemas.openxmlformats.org/drawingml/2006/main">
               <a:ext uri="{FF2B5EF4-FFF2-40B4-BE49-F238E27FC236}">
-                <a16:creationId xmlns:a16="http://schemas.microsoft.com/office/drawing/2014/main" id="{351B68D3-67DE-414F-B31E-0CE226FB5F08}"/>
+                <a16:creationId xmlns:a16="http://schemas.microsoft.com/office/drawing/2014/main" id="{2097E7B6-EA6A-47A0-A943-3E1957218522}"/>
               </a:ext>
             </a:extLst>
           </p:cNvPr>
@@ -7956,7 +7956,7 @@
           <p:cNvPr id="21" name="">
             <a:extLst xmlns:a="http://schemas.openxmlformats.org/drawingml/2006/main">
               <a:ext uri="{FF2B5EF4-FFF2-40B4-BE49-F238E27FC236}">
-                <a16:creationId xmlns:a16="http://schemas.microsoft.com/office/drawing/2014/main" id="{A1C9DD9C-B9F7-4C18-AEC9-14B1A68B4137}"/>
+                <a16:creationId xmlns:a16="http://schemas.microsoft.com/office/drawing/2014/main" id="{734A2D93-4A97-41A9-9479-57B6A85490D4}"/>
               </a:ext>
             </a:extLst>
           </p:cNvPr>
@@ -8046,7 +8046,7 @@
     </p:spTree>
     <p:extLst>
       <p:ext uri="{BB962C8B-B14F-4D97-AF65-F5344CB8AC3E}">
-        <p14:creationId xmlns:p14="http://schemas.microsoft.com/office/powerpoint/2010/main" val="693534533"/>
+        <p14:creationId xmlns:p14="http://schemas.microsoft.com/office/powerpoint/2010/main" val="1414564834"/>
       </p:ext>
     </p:extLst>
   </p:cSld>
@@ -8059,7 +8059,7 @@
     <p:bg>
       <p:bgPr>
         <a:solidFill xmlns:a="http://schemas.openxmlformats.org/drawingml/2006/main">
-          <a:srgbClr val="0E1B3E"/>
+          <a:srgbClr val="070F26"/>
         </a:solidFill>
       </p:bgPr>
     </p:bg>
@@ -8077,7 +8077,7 @@
           <p:cNvPr id="1" name="">
             <a:extLst xmlns:a="http://schemas.openxmlformats.org/drawingml/2006/main">
               <a:ext uri="{FF2B5EF4-FFF2-40B4-BE49-F238E27FC236}">
-                <a16:creationId xmlns:a16="http://schemas.microsoft.com/office/drawing/2014/main" id="{32134C93-335B-48BD-B939-F2C98119040B}"/>
+                <a16:creationId xmlns:a16="http://schemas.microsoft.com/office/drawing/2014/main" id="{7D577FD1-5720-4D06-AD5A-32133CF12AFC}"/>
               </a:ext>
             </a:extLst>
           </p:cNvPr>
@@ -8095,7 +8095,7 @@
             <a:avLst/>
           </a:prstGeom>
           <a:solidFill xmlns:a="http://schemas.openxmlformats.org/drawingml/2006/main">
-            <a:srgbClr val="0E1B3E"/>
+            <a:srgbClr val="070F26"/>
           </a:solidFill>
           <a:ln xmlns:a="http://schemas.openxmlformats.org/drawingml/2006/main" w="0">
             <a:solidFill>
@@ -8116,7 +8116,7 @@
           <p:nvPr/>
         </p:nvPicPr>
         <p:blipFill>
-          <a:blip xmlns:r="http://schemas.openxmlformats.org/officeDocument/2006/relationships" xmlns:a="http://schemas.openxmlformats.org/drawingml/2006/main" r:embed="Rca726faa3da14bd4"/>
+          <a:blip xmlns:r="http://schemas.openxmlformats.org/officeDocument/2006/relationships" xmlns:a="http://schemas.openxmlformats.org/drawingml/2006/main" r:embed="R04dc1b3294b749c3"/>
           <a:stretch xmlns:a="http://schemas.openxmlformats.org/drawingml/2006/main"/>
         </p:blipFill>
         <p:spPr>
@@ -8134,7 +8134,7 @@
           <p:cNvPr id="3" name="">
             <a:extLst xmlns:a="http://schemas.openxmlformats.org/drawingml/2006/main">
               <a:ext uri="{FF2B5EF4-FFF2-40B4-BE49-F238E27FC236}">
-                <a16:creationId xmlns:a16="http://schemas.microsoft.com/office/drawing/2014/main" id="{4B387C4B-C6F2-4D35-AE82-6C9684487E83}"/>
+                <a16:creationId xmlns:a16="http://schemas.microsoft.com/office/drawing/2014/main" id="{704A8F6C-DE33-42C0-A55C-411433647CA5}"/>
               </a:ext>
             </a:extLst>
           </p:cNvPr>
@@ -8192,7 +8192,7 @@
           <p:cNvPr id="4" name="">
             <a:extLst xmlns:a="http://schemas.openxmlformats.org/drawingml/2006/main">
               <a:ext uri="{FF2B5EF4-FFF2-40B4-BE49-F238E27FC236}">
-                <a16:creationId xmlns:a16="http://schemas.microsoft.com/office/drawing/2014/main" id="{E0BCCD01-3FA3-428F-B53A-C3B17A29DC24}"/>
+                <a16:creationId xmlns:a16="http://schemas.microsoft.com/office/drawing/2014/main" id="{CCA5375B-A4A2-4045-B474-673784A36F39}"/>
               </a:ext>
             </a:extLst>
           </p:cNvPr>
@@ -8250,7 +8250,7 @@
           <p:cNvPr id="5" name="">
             <a:extLst xmlns:a="http://schemas.openxmlformats.org/drawingml/2006/main">
               <a:ext uri="{FF2B5EF4-FFF2-40B4-BE49-F238E27FC236}">
-                <a16:creationId xmlns:a16="http://schemas.microsoft.com/office/drawing/2014/main" id="{FDD217E4-D88F-4CFC-9089-117C4FD34E94}"/>
+                <a16:creationId xmlns:a16="http://schemas.microsoft.com/office/drawing/2014/main" id="{E626C488-4AE3-4F3C-AC68-65EF093E8856}"/>
               </a:ext>
             </a:extLst>
           </p:cNvPr>
@@ -8308,7 +8308,7 @@
           <p:cNvPr id="6" name="">
             <a:extLst xmlns:a="http://schemas.openxmlformats.org/drawingml/2006/main">
               <a:ext uri="{FF2B5EF4-FFF2-40B4-BE49-F238E27FC236}">
-                <a16:creationId xmlns:a16="http://schemas.microsoft.com/office/drawing/2014/main" id="{1096EB9E-889A-41A1-B15A-166FCFF742C8}"/>
+                <a16:creationId xmlns:a16="http://schemas.microsoft.com/office/drawing/2014/main" id="{113DE267-1492-4778-B987-38F404E8141D}"/>
               </a:ext>
             </a:extLst>
           </p:cNvPr>
@@ -8370,13 +8370,13 @@
           <p:nvPr/>
         </p:nvPicPr>
         <p:blipFill>
-          <a:blip xmlns:r="http://schemas.openxmlformats.org/officeDocument/2006/relationships" xmlns:a="http://schemas.openxmlformats.org/drawingml/2006/main" r:embed="Rae1f00ab64734588"/>
+          <a:blip xmlns:r="http://schemas.openxmlformats.org/officeDocument/2006/relationships" xmlns:a="http://schemas.openxmlformats.org/drawingml/2006/main" r:embed="R6c0794c1711c416a"/>
           <a:stretch xmlns:a="http://schemas.openxmlformats.org/drawingml/2006/main"/>
         </p:blipFill>
         <p:spPr>
           <a:xfrm xmlns:a="http://schemas.openxmlformats.org/drawingml/2006/main">
-            <a:off x="476250" y="1257300"/>
-            <a:ext cx="2667000" cy="4533900"/>
+            <a:off x="0" y="1746250"/>
+            <a:ext cx="2667000" cy="3556000"/>
           </a:xfrm>
           <a:prstGeom xmlns:a="http://schemas.openxmlformats.org/drawingml/2006/main" prst="rect">
             <a:avLst/>
@@ -8388,7 +8388,7 @@
           <p:cNvPr id="8" name="">
             <a:extLst xmlns:a="http://schemas.openxmlformats.org/drawingml/2006/main">
               <a:ext uri="{FF2B5EF4-FFF2-40B4-BE49-F238E27FC236}">
-                <a16:creationId xmlns:a16="http://schemas.microsoft.com/office/drawing/2014/main" id="{F5E967E9-A2E5-484A-8535-CEF39FEEBBF9}"/>
+                <a16:creationId xmlns:a16="http://schemas.microsoft.com/office/drawing/2014/main" id="{E6E58647-2B73-466B-9C60-73FB792A279A}"/>
               </a:ext>
             </a:extLst>
           </p:cNvPr>
@@ -8446,7 +8446,7 @@
           <p:cNvPr id="9" name="">
             <a:extLst xmlns:a="http://schemas.openxmlformats.org/drawingml/2006/main">
               <a:ext uri="{FF2B5EF4-FFF2-40B4-BE49-F238E27FC236}">
-                <a16:creationId xmlns:a16="http://schemas.microsoft.com/office/drawing/2014/main" id="{E98704FE-AA79-4952-954B-7120C56812B7}"/>
+                <a16:creationId xmlns:a16="http://schemas.microsoft.com/office/drawing/2014/main" id="{8BD98C7F-CA87-4DF1-8F23-363E66F3E7B1}"/>
               </a:ext>
             </a:extLst>
           </p:cNvPr>
@@ -8504,7 +8504,7 @@
           <p:cNvPr id="10" name="">
             <a:extLst xmlns:a="http://schemas.openxmlformats.org/drawingml/2006/main">
               <a:ext uri="{FF2B5EF4-FFF2-40B4-BE49-F238E27FC236}">
-                <a16:creationId xmlns:a16="http://schemas.microsoft.com/office/drawing/2014/main" id="{A9F95629-56DF-4E23-B45F-EA9E66902BC6}"/>
+                <a16:creationId xmlns:a16="http://schemas.microsoft.com/office/drawing/2014/main" id="{93984A11-AC0E-4FD2-9100-0C8581192548}"/>
               </a:ext>
             </a:extLst>
           </p:cNvPr>
@@ -8560,7 +8560,7 @@
     </p:spTree>
     <p:extLst>
       <p:ext uri="{BB962C8B-B14F-4D97-AF65-F5344CB8AC3E}">
-        <p14:creationId xmlns:p14="http://schemas.microsoft.com/office/powerpoint/2010/main" val="1001575242"/>
+        <p14:creationId xmlns:p14="http://schemas.microsoft.com/office/powerpoint/2010/main" val="1399658906"/>
       </p:ext>
     </p:extLst>
   </p:cSld>
@@ -8591,7 +8591,7 @@
           <p:cNvPr id="1" name="">
             <a:extLst xmlns:a="http://schemas.openxmlformats.org/drawingml/2006/main">
               <a:ext uri="{FF2B5EF4-FFF2-40B4-BE49-F238E27FC236}">
-                <a16:creationId xmlns:a16="http://schemas.microsoft.com/office/drawing/2014/main" id="{F41E5C09-CA02-415B-98B1-62EF78DF36FB}"/>
+                <a16:creationId xmlns:a16="http://schemas.microsoft.com/office/drawing/2014/main" id="{4419FE62-8D1D-4057-A738-35221EFA064F}"/>
               </a:ext>
             </a:extLst>
           </p:cNvPr>
@@ -8630,7 +8630,7 @@
           <p:nvPr/>
         </p:nvPicPr>
         <p:blipFill>
-          <a:blip xmlns:r="http://schemas.openxmlformats.org/officeDocument/2006/relationships" xmlns:a="http://schemas.openxmlformats.org/drawingml/2006/main" r:embed="Rea066cb3103541b8"/>
+          <a:blip xmlns:r="http://schemas.openxmlformats.org/officeDocument/2006/relationships" xmlns:a="http://schemas.openxmlformats.org/drawingml/2006/main" r:embed="R6b1152f524f74812"/>
           <a:stretch xmlns:a="http://schemas.openxmlformats.org/drawingml/2006/main"/>
         </p:blipFill>
         <p:spPr>
@@ -8648,7 +8648,7 @@
           <p:cNvPr id="3" name="">
             <a:extLst xmlns:a="http://schemas.openxmlformats.org/drawingml/2006/main">
               <a:ext uri="{FF2B5EF4-FFF2-40B4-BE49-F238E27FC236}">
-                <a16:creationId xmlns:a16="http://schemas.microsoft.com/office/drawing/2014/main" id="{FFD71770-4E3D-4EFB-947F-D413FAA74A88}"/>
+                <a16:creationId xmlns:a16="http://schemas.microsoft.com/office/drawing/2014/main" id="{955A3F33-F556-4AB1-BBC6-85418EE5461B}"/>
               </a:ext>
             </a:extLst>
           </p:cNvPr>
@@ -8686,14 +8686,14 @@
             <a:pPr algn="r">
               <a:defRPr sz="825" b="1">
                 <a:solidFill>
-                  <a:srgbClr val="0E1B3E"/>
+                  <a:srgbClr val="070F26"/>
                 </a:solidFill>
               </a:defRPr>
             </a:pPr>
             <a:r>
               <a:rPr sz="825" b="1">
                 <a:solidFill>
-                  <a:srgbClr val="0E1B3E"/>
+                  <a:srgbClr val="070F26"/>
                 </a:solidFill>
               </a:rPr>
               <a:t>NTT DATA UNIVERSITY</a:t>
@@ -8706,7 +8706,7 @@
           <p:cNvPr id="4" name="">
             <a:extLst xmlns:a="http://schemas.openxmlformats.org/drawingml/2006/main">
               <a:ext uri="{FF2B5EF4-FFF2-40B4-BE49-F238E27FC236}">
-                <a16:creationId xmlns:a16="http://schemas.microsoft.com/office/drawing/2014/main" id="{6D9C281E-1EBE-443A-8CC5-573B909702BD}"/>
+                <a16:creationId xmlns:a16="http://schemas.microsoft.com/office/drawing/2014/main" id="{26F82C30-6458-45C7-A1D2-F2B0F1379CE5}"/>
               </a:ext>
             </a:extLst>
           </p:cNvPr>
@@ -8764,7 +8764,7 @@
           <p:cNvPr id="5" name="">
             <a:extLst xmlns:a="http://schemas.openxmlformats.org/drawingml/2006/main">
               <a:ext uri="{FF2B5EF4-FFF2-40B4-BE49-F238E27FC236}">
-                <a16:creationId xmlns:a16="http://schemas.microsoft.com/office/drawing/2014/main" id="{8E75CDD8-B3C9-4513-91DA-AEA252F06140}"/>
+                <a16:creationId xmlns:a16="http://schemas.microsoft.com/office/drawing/2014/main" id="{85EC60A0-6B5C-460A-8ECC-7B5B2026C9F5}"/>
               </a:ext>
             </a:extLst>
           </p:cNvPr>
@@ -8822,7 +8822,7 @@
           <p:cNvPr id="6" name="">
             <a:extLst xmlns:a="http://schemas.openxmlformats.org/drawingml/2006/main">
               <a:ext uri="{FF2B5EF4-FFF2-40B4-BE49-F238E27FC236}">
-                <a16:creationId xmlns:a16="http://schemas.microsoft.com/office/drawing/2014/main" id="{397F9FD2-700F-4DA4-88B4-227F1E3CBA1B}"/>
+                <a16:creationId xmlns:a16="http://schemas.microsoft.com/office/drawing/2014/main" id="{12DA5245-3344-453C-BAB8-71C2F3C27D57}"/>
               </a:ext>
             </a:extLst>
           </p:cNvPr>
@@ -8860,14 +8860,14 @@
             <a:pPr algn="r">
               <a:defRPr sz="675" b="1">
                 <a:solidFill>
-                  <a:srgbClr val="0E1B3E"/>
+                  <a:srgbClr val="070F26"/>
                 </a:solidFill>
               </a:defRPr>
             </a:pPr>
             <a:r>
               <a:rPr sz="675" b="1">
                 <a:solidFill>
-                  <a:srgbClr val="0E1B3E"/>
+                  <a:srgbClr val="070F26"/>
                 </a:solidFill>
               </a:rPr>
               <a:t>NTT DATA UNIVERSITY</a:t>
@@ -8880,7 +8880,7 @@
           <p:cNvPr id="7" name="">
             <a:extLst xmlns:a="http://schemas.openxmlformats.org/drawingml/2006/main">
               <a:ext uri="{FF2B5EF4-FFF2-40B4-BE49-F238E27FC236}">
-                <a16:creationId xmlns:a16="http://schemas.microsoft.com/office/drawing/2014/main" id="{894A2CD1-4EA8-42A4-833B-8A1103C99293}"/>
+                <a16:creationId xmlns:a16="http://schemas.microsoft.com/office/drawing/2014/main" id="{F928F407-E986-4A05-8E1C-DE2B7D460D54}"/>
               </a:ext>
             </a:extLst>
           </p:cNvPr>
@@ -8938,7 +8938,7 @@
           <p:cNvPr id="8" name="">
             <a:extLst xmlns:a="http://schemas.openxmlformats.org/drawingml/2006/main">
               <a:ext uri="{FF2B5EF4-FFF2-40B4-BE49-F238E27FC236}">
-                <a16:creationId xmlns:a16="http://schemas.microsoft.com/office/drawing/2014/main" id="{8B0E11F2-B081-49DC-A4E3-B11E697BED7D}"/>
+                <a16:creationId xmlns:a16="http://schemas.microsoft.com/office/drawing/2014/main" id="{007E1A3D-B343-44F7-944D-61192B17A976}"/>
               </a:ext>
             </a:extLst>
           </p:cNvPr>
@@ -8976,14 +8976,14 @@
             <a:pPr algn="l">
               <a:defRPr sz="2400" b="0">
                 <a:solidFill>
-                  <a:srgbClr val="0E1B3E"/>
+                  <a:srgbClr val="070F26"/>
                 </a:solidFill>
               </a:defRPr>
             </a:pPr>
             <a:r>
               <a:rPr sz="2400" b="0">
                 <a:solidFill>
-                  <a:srgbClr val="0E1B3E"/>
+                  <a:srgbClr val="070F26"/>
                 </a:solidFill>
               </a:rPr>
               <a:t>Conectando ao pipeline que vocês construíram</a:t>
@@ -8996,7 +8996,7 @@
           <p:cNvPr id="9" name="">
             <a:extLst xmlns:a="http://schemas.openxmlformats.org/drawingml/2006/main">
               <a:ext uri="{FF2B5EF4-FFF2-40B4-BE49-F238E27FC236}">
-                <a16:creationId xmlns:a16="http://schemas.microsoft.com/office/drawing/2014/main" id="{D72DFF18-796A-46AA-84F1-CC80DF7ED4F4}"/>
+                <a16:creationId xmlns:a16="http://schemas.microsoft.com/office/drawing/2014/main" id="{668B5FA1-ED50-4A0A-A2B9-6A2259C27DA2}"/>
               </a:ext>
             </a:extLst>
           </p:cNvPr>
@@ -9054,7 +9054,7 @@
           <p:cNvPr id="10" name="">
             <a:extLst xmlns:a="http://schemas.openxmlformats.org/drawingml/2006/main">
               <a:ext uri="{FF2B5EF4-FFF2-40B4-BE49-F238E27FC236}">
-                <a16:creationId xmlns:a16="http://schemas.microsoft.com/office/drawing/2014/main" id="{89079F2E-4F34-4F3A-824F-810AFDCF498C}"/>
+                <a16:creationId xmlns:a16="http://schemas.microsoft.com/office/drawing/2014/main" id="{11999C76-6210-48D3-B97E-5BF3F03959FD}"/>
               </a:ext>
             </a:extLst>
           </p:cNvPr>
@@ -9087,7 +9087,7 @@
           <p:cNvPr id="11" name="">
             <a:extLst xmlns:a="http://schemas.openxmlformats.org/drawingml/2006/main">
               <a:ext uri="{FF2B5EF4-FFF2-40B4-BE49-F238E27FC236}">
-                <a16:creationId xmlns:a16="http://schemas.microsoft.com/office/drawing/2014/main" id="{0520D24E-3CD2-40B8-86D7-63930ED8EB05}"/>
+                <a16:creationId xmlns:a16="http://schemas.microsoft.com/office/drawing/2014/main" id="{E802DF7F-F5E0-48FD-9AA4-B584504836B2}"/>
               </a:ext>
             </a:extLst>
           </p:cNvPr>
@@ -9122,7 +9122,7 @@
           <p:cNvPr id="12" name="">
             <a:extLst xmlns:a="http://schemas.openxmlformats.org/drawingml/2006/main">
               <a:ext uri="{FF2B5EF4-FFF2-40B4-BE49-F238E27FC236}">
-                <a16:creationId xmlns:a16="http://schemas.microsoft.com/office/drawing/2014/main" id="{4D6FAEDE-9AA4-4B27-9017-46AE3A9A06B7}"/>
+                <a16:creationId xmlns:a16="http://schemas.microsoft.com/office/drawing/2014/main" id="{7642D38E-0FCB-4227-94AC-2ADAD4689E02}"/>
               </a:ext>
             </a:extLst>
           </p:cNvPr>
@@ -9180,7 +9180,7 @@
           <p:cNvPr id="13" name="">
             <a:extLst xmlns:a="http://schemas.openxmlformats.org/drawingml/2006/main">
               <a:ext uri="{FF2B5EF4-FFF2-40B4-BE49-F238E27FC236}">
-                <a16:creationId xmlns:a16="http://schemas.microsoft.com/office/drawing/2014/main" id="{2CF949C0-1AE4-4850-AC2C-2118C951E64B}"/>
+                <a16:creationId xmlns:a16="http://schemas.microsoft.com/office/drawing/2014/main" id="{F4148120-EE5D-4CEE-9F28-B374748555DB}"/>
               </a:ext>
             </a:extLst>
           </p:cNvPr>
@@ -9255,7 +9255,7 @@
           <p:cNvPr id="14" name="">
             <a:extLst xmlns:a="http://schemas.openxmlformats.org/drawingml/2006/main">
               <a:ext uri="{FF2B5EF4-FFF2-40B4-BE49-F238E27FC236}">
-                <a16:creationId xmlns:a16="http://schemas.microsoft.com/office/drawing/2014/main" id="{3BFDE44D-B641-4D12-912C-51EE639AE142}"/>
+                <a16:creationId xmlns:a16="http://schemas.microsoft.com/office/drawing/2014/main" id="{50EA6F0A-77A8-4D85-A0DF-DD662AEC33A7}"/>
               </a:ext>
             </a:extLst>
           </p:cNvPr>
@@ -9288,7 +9288,7 @@
           <p:cNvPr id="15" name="">
             <a:extLst xmlns:a="http://schemas.openxmlformats.org/drawingml/2006/main">
               <a:ext uri="{FF2B5EF4-FFF2-40B4-BE49-F238E27FC236}">
-                <a16:creationId xmlns:a16="http://schemas.microsoft.com/office/drawing/2014/main" id="{02134529-837E-4614-8839-32C8C7CDA327}"/>
+                <a16:creationId xmlns:a16="http://schemas.microsoft.com/office/drawing/2014/main" id="{05237C11-B52E-42CB-A5E7-634751C48B67}"/>
               </a:ext>
             </a:extLst>
           </p:cNvPr>
@@ -9323,7 +9323,7 @@
           <p:cNvPr id="16" name="">
             <a:extLst xmlns:a="http://schemas.openxmlformats.org/drawingml/2006/main">
               <a:ext uri="{FF2B5EF4-FFF2-40B4-BE49-F238E27FC236}">
-                <a16:creationId xmlns:a16="http://schemas.microsoft.com/office/drawing/2014/main" id="{025A16CC-0919-40A5-BB62-449B72BD4383}"/>
+                <a16:creationId xmlns:a16="http://schemas.microsoft.com/office/drawing/2014/main" id="{C27E7E2F-FD26-457B-B992-29FCE3F914E3}"/>
               </a:ext>
             </a:extLst>
           </p:cNvPr>
@@ -9381,7 +9381,7 @@
           <p:cNvPr id="17" name="">
             <a:extLst xmlns:a="http://schemas.openxmlformats.org/drawingml/2006/main">
               <a:ext uri="{FF2B5EF4-FFF2-40B4-BE49-F238E27FC236}">
-                <a16:creationId xmlns:a16="http://schemas.microsoft.com/office/drawing/2014/main" id="{94AE994E-7F0A-44BB-9F87-DB737093AFA5}"/>
+                <a16:creationId xmlns:a16="http://schemas.microsoft.com/office/drawing/2014/main" id="{0BF30BBC-F2A8-4B13-89F5-30196958C2B1}"/>
               </a:ext>
             </a:extLst>
           </p:cNvPr>
@@ -9456,7 +9456,7 @@
           <p:cNvPr id="18" name="">
             <a:extLst xmlns:a="http://schemas.openxmlformats.org/drawingml/2006/main">
               <a:ext uri="{FF2B5EF4-FFF2-40B4-BE49-F238E27FC236}">
-                <a16:creationId xmlns:a16="http://schemas.microsoft.com/office/drawing/2014/main" id="{ACE2D642-1674-40D2-881F-7BD53FBCFA18}"/>
+                <a16:creationId xmlns:a16="http://schemas.microsoft.com/office/drawing/2014/main" id="{0B7993DA-62DB-44DA-8CA2-F538F12DBCB8}"/>
               </a:ext>
             </a:extLst>
           </p:cNvPr>
@@ -9489,7 +9489,7 @@
           <p:cNvPr id="19" name="">
             <a:extLst xmlns:a="http://schemas.openxmlformats.org/drawingml/2006/main">
               <a:ext uri="{FF2B5EF4-FFF2-40B4-BE49-F238E27FC236}">
-                <a16:creationId xmlns:a16="http://schemas.microsoft.com/office/drawing/2014/main" id="{54B2D26C-603E-4A93-82E1-B348D3E6AF5B}"/>
+                <a16:creationId xmlns:a16="http://schemas.microsoft.com/office/drawing/2014/main" id="{0F108289-8F29-4026-A5D4-B2CCDF659AF9}"/>
               </a:ext>
             </a:extLst>
           </p:cNvPr>
@@ -9524,7 +9524,7 @@
           <p:cNvPr id="20" name="">
             <a:extLst xmlns:a="http://schemas.openxmlformats.org/drawingml/2006/main">
               <a:ext uri="{FF2B5EF4-FFF2-40B4-BE49-F238E27FC236}">
-                <a16:creationId xmlns:a16="http://schemas.microsoft.com/office/drawing/2014/main" id="{05896A0D-6664-4586-82A9-3C5A826F71CF}"/>
+                <a16:creationId xmlns:a16="http://schemas.microsoft.com/office/drawing/2014/main" id="{2FAB1D52-675C-4DD0-B2B0-9D654C720BE4}"/>
               </a:ext>
             </a:extLst>
           </p:cNvPr>
@@ -9582,7 +9582,7 @@
           <p:cNvPr id="21" name="">
             <a:extLst xmlns:a="http://schemas.openxmlformats.org/drawingml/2006/main">
               <a:ext uri="{FF2B5EF4-FFF2-40B4-BE49-F238E27FC236}">
-                <a16:creationId xmlns:a16="http://schemas.microsoft.com/office/drawing/2014/main" id="{A8112575-3093-42A5-8F4A-0259D93F9D1D}"/>
+                <a16:creationId xmlns:a16="http://schemas.microsoft.com/office/drawing/2014/main" id="{E3C8E64C-F3C1-4588-B9FA-D3F927BDC8EA}"/>
               </a:ext>
             </a:extLst>
           </p:cNvPr>
@@ -9657,7 +9657,7 @@
           <p:cNvPr id="22" name="">
             <a:extLst xmlns:a="http://schemas.openxmlformats.org/drawingml/2006/main">
               <a:ext uri="{FF2B5EF4-FFF2-40B4-BE49-F238E27FC236}">
-                <a16:creationId xmlns:a16="http://schemas.microsoft.com/office/drawing/2014/main" id="{0844E4B2-1F76-4F56-9C02-DC6FF280F115}"/>
+                <a16:creationId xmlns:a16="http://schemas.microsoft.com/office/drawing/2014/main" id="{7D29A309-AE50-42D4-AB95-251E1039CFBB}"/>
               </a:ext>
             </a:extLst>
           </p:cNvPr>
@@ -9690,7 +9690,7 @@
           <p:cNvPr id="23" name="">
             <a:extLst xmlns:a="http://schemas.openxmlformats.org/drawingml/2006/main">
               <a:ext uri="{FF2B5EF4-FFF2-40B4-BE49-F238E27FC236}">
-                <a16:creationId xmlns:a16="http://schemas.microsoft.com/office/drawing/2014/main" id="{64E2BA86-4096-4DDD-ADEC-083E147AE0A2}"/>
+                <a16:creationId xmlns:a16="http://schemas.microsoft.com/office/drawing/2014/main" id="{33228AC2-0CB9-4C99-8B7C-D58444B63F04}"/>
               </a:ext>
             </a:extLst>
           </p:cNvPr>
@@ -9725,7 +9725,7 @@
           <p:cNvPr id="24" name="">
             <a:extLst xmlns:a="http://schemas.openxmlformats.org/drawingml/2006/main">
               <a:ext uri="{FF2B5EF4-FFF2-40B4-BE49-F238E27FC236}">
-                <a16:creationId xmlns:a16="http://schemas.microsoft.com/office/drawing/2014/main" id="{9996BAA7-6623-47F8-AA91-537C93564463}"/>
+                <a16:creationId xmlns:a16="http://schemas.microsoft.com/office/drawing/2014/main" id="{CEE85506-54E1-4DC4-B991-AF220ACAD5FC}"/>
               </a:ext>
             </a:extLst>
           </p:cNvPr>
@@ -9783,7 +9783,7 @@
           <p:cNvPr id="25" name="">
             <a:extLst xmlns:a="http://schemas.openxmlformats.org/drawingml/2006/main">
               <a:ext uri="{FF2B5EF4-FFF2-40B4-BE49-F238E27FC236}">
-                <a16:creationId xmlns:a16="http://schemas.microsoft.com/office/drawing/2014/main" id="{9D92D7DD-1519-42DD-A81D-D691B06EA0F4}"/>
+                <a16:creationId xmlns:a16="http://schemas.microsoft.com/office/drawing/2014/main" id="{B4856161-6978-43CE-AB0A-5925D0BCBEEA}"/>
               </a:ext>
             </a:extLst>
           </p:cNvPr>
@@ -9856,7 +9856,7 @@
     </p:spTree>
     <p:extLst>
       <p:ext uri="{BB962C8B-B14F-4D97-AF65-F5344CB8AC3E}">
-        <p14:creationId xmlns:p14="http://schemas.microsoft.com/office/powerpoint/2010/main" val="1694165739"/>
+        <p14:creationId xmlns:p14="http://schemas.microsoft.com/office/powerpoint/2010/main" val="1984757729"/>
       </p:ext>
     </p:extLst>
   </p:cSld>
@@ -9887,7 +9887,7 @@
           <p:cNvPr id="1" name="">
             <a:extLst xmlns:a="http://schemas.openxmlformats.org/drawingml/2006/main">
               <a:ext uri="{FF2B5EF4-FFF2-40B4-BE49-F238E27FC236}">
-                <a16:creationId xmlns:a16="http://schemas.microsoft.com/office/drawing/2014/main" id="{B9B89962-0354-4F12-A697-09DEF8543064}"/>
+                <a16:creationId xmlns:a16="http://schemas.microsoft.com/office/drawing/2014/main" id="{8CCCCE17-C646-45B5-8BDE-8AC421AF49E8}"/>
               </a:ext>
             </a:extLst>
           </p:cNvPr>
@@ -9926,7 +9926,7 @@
           <p:nvPr/>
         </p:nvPicPr>
         <p:blipFill>
-          <a:blip xmlns:r="http://schemas.openxmlformats.org/officeDocument/2006/relationships" xmlns:a="http://schemas.openxmlformats.org/drawingml/2006/main" r:embed="R52af823598d74c8b"/>
+          <a:blip xmlns:r="http://schemas.openxmlformats.org/officeDocument/2006/relationships" xmlns:a="http://schemas.openxmlformats.org/drawingml/2006/main" r:embed="R26b0b2489bca4aa7"/>
           <a:stretch xmlns:a="http://schemas.openxmlformats.org/drawingml/2006/main"/>
         </p:blipFill>
         <p:spPr>
@@ -9944,7 +9944,7 @@
           <p:cNvPr id="3" name="">
             <a:extLst xmlns:a="http://schemas.openxmlformats.org/drawingml/2006/main">
               <a:ext uri="{FF2B5EF4-FFF2-40B4-BE49-F238E27FC236}">
-                <a16:creationId xmlns:a16="http://schemas.microsoft.com/office/drawing/2014/main" id="{E98735AF-B963-45ED-AC11-F4D78C57FB59}"/>
+                <a16:creationId xmlns:a16="http://schemas.microsoft.com/office/drawing/2014/main" id="{75D5FCE3-A6B7-428F-9673-48D14AD8556B}"/>
               </a:ext>
             </a:extLst>
           </p:cNvPr>
@@ -9982,14 +9982,14 @@
             <a:pPr algn="r">
               <a:defRPr sz="825" b="1">
                 <a:solidFill>
-                  <a:srgbClr val="0E1B3E"/>
+                  <a:srgbClr val="070F26"/>
                 </a:solidFill>
               </a:defRPr>
             </a:pPr>
             <a:r>
               <a:rPr sz="825" b="1">
                 <a:solidFill>
-                  <a:srgbClr val="0E1B3E"/>
+                  <a:srgbClr val="070F26"/>
                 </a:solidFill>
               </a:rPr>
               <a:t>NTT DATA UNIVERSITY</a:t>
@@ -10002,7 +10002,7 @@
           <p:cNvPr id="4" name="">
             <a:extLst xmlns:a="http://schemas.openxmlformats.org/drawingml/2006/main">
               <a:ext uri="{FF2B5EF4-FFF2-40B4-BE49-F238E27FC236}">
-                <a16:creationId xmlns:a16="http://schemas.microsoft.com/office/drawing/2014/main" id="{B76C5CD3-0363-40E7-A34D-A8CC322A153E}"/>
+                <a16:creationId xmlns:a16="http://schemas.microsoft.com/office/drawing/2014/main" id="{F08CB4F5-210C-451E-A017-7AF4D83DC0FD}"/>
               </a:ext>
             </a:extLst>
           </p:cNvPr>
@@ -10060,7 +10060,7 @@
           <p:cNvPr id="5" name="">
             <a:extLst xmlns:a="http://schemas.openxmlformats.org/drawingml/2006/main">
               <a:ext uri="{FF2B5EF4-FFF2-40B4-BE49-F238E27FC236}">
-                <a16:creationId xmlns:a16="http://schemas.microsoft.com/office/drawing/2014/main" id="{404D93D7-D1C9-4C4A-87C8-EDF07FAE2845}"/>
+                <a16:creationId xmlns:a16="http://schemas.microsoft.com/office/drawing/2014/main" id="{90771A6C-D551-4D08-B11E-2B5C6E9B0732}"/>
               </a:ext>
             </a:extLst>
           </p:cNvPr>
@@ -10118,7 +10118,7 @@
           <p:cNvPr id="6" name="">
             <a:extLst xmlns:a="http://schemas.openxmlformats.org/drawingml/2006/main">
               <a:ext uri="{FF2B5EF4-FFF2-40B4-BE49-F238E27FC236}">
-                <a16:creationId xmlns:a16="http://schemas.microsoft.com/office/drawing/2014/main" id="{DC1B6537-4A0A-41F0-99D7-E91200CB46B4}"/>
+                <a16:creationId xmlns:a16="http://schemas.microsoft.com/office/drawing/2014/main" id="{838CD4C4-A2A9-4A6E-8234-F3BAA14FA72F}"/>
               </a:ext>
             </a:extLst>
           </p:cNvPr>
@@ -10156,14 +10156,14 @@
             <a:pPr algn="r">
               <a:defRPr sz="675" b="1">
                 <a:solidFill>
-                  <a:srgbClr val="0E1B3E"/>
+                  <a:srgbClr val="070F26"/>
                 </a:solidFill>
               </a:defRPr>
             </a:pPr>
             <a:r>
               <a:rPr sz="675" b="1">
                 <a:solidFill>
-                  <a:srgbClr val="0E1B3E"/>
+                  <a:srgbClr val="070F26"/>
                 </a:solidFill>
               </a:rPr>
               <a:t>NTT DATA UNIVERSITY</a:t>
@@ -10176,7 +10176,7 @@
           <p:cNvPr id="7" name="">
             <a:extLst xmlns:a="http://schemas.openxmlformats.org/drawingml/2006/main">
               <a:ext uri="{FF2B5EF4-FFF2-40B4-BE49-F238E27FC236}">
-                <a16:creationId xmlns:a16="http://schemas.microsoft.com/office/drawing/2014/main" id="{33473BFB-F94A-4C7C-A64A-0C2ED94176DC}"/>
+                <a16:creationId xmlns:a16="http://schemas.microsoft.com/office/drawing/2014/main" id="{3415D23D-5EBE-40F8-A4F5-B90F3A3B08DF}"/>
               </a:ext>
             </a:extLst>
           </p:cNvPr>
@@ -10234,7 +10234,7 @@
           <p:cNvPr id="8" name="">
             <a:extLst xmlns:a="http://schemas.openxmlformats.org/drawingml/2006/main">
               <a:ext uri="{FF2B5EF4-FFF2-40B4-BE49-F238E27FC236}">
-                <a16:creationId xmlns:a16="http://schemas.microsoft.com/office/drawing/2014/main" id="{E4D75FD0-0515-43F9-A5F1-4CB5186EAD85}"/>
+                <a16:creationId xmlns:a16="http://schemas.microsoft.com/office/drawing/2014/main" id="{F40A2467-AA55-49D8-B8A6-BA76BAE4678A}"/>
               </a:ext>
             </a:extLst>
           </p:cNvPr>
@@ -10272,14 +10272,14 @@
             <a:pPr algn="l">
               <a:defRPr sz="2400" b="0">
                 <a:solidFill>
-                  <a:srgbClr val="0E1B3E"/>
+                  <a:srgbClr val="070F26"/>
                 </a:solidFill>
               </a:defRPr>
             </a:pPr>
             <a:r>
               <a:rPr sz="2400" b="0">
                 <a:solidFill>
-                  <a:srgbClr val="0E1B3E"/>
+                  <a:srgbClr val="070F26"/>
                 </a:solidFill>
               </a:rPr>
               <a:t>Conecte cada conceito com a operação do dia-a-dia</a:t>
@@ -10292,7 +10292,7 @@
           <p:cNvPr id="9" name="">
             <a:extLst xmlns:a="http://schemas.openxmlformats.org/drawingml/2006/main">
               <a:ext uri="{FF2B5EF4-FFF2-40B4-BE49-F238E27FC236}">
-                <a16:creationId xmlns:a16="http://schemas.microsoft.com/office/drawing/2014/main" id="{A1B21EE2-19C6-4C61-9ABE-7573A08AC6ED}"/>
+                <a16:creationId xmlns:a16="http://schemas.microsoft.com/office/drawing/2014/main" id="{80B3EE30-E802-42C8-825D-A7A105703245}"/>
               </a:ext>
             </a:extLst>
           </p:cNvPr>
@@ -10350,7 +10350,7 @@
           <p:cNvPr id="10" name="">
             <a:extLst xmlns:a="http://schemas.openxmlformats.org/drawingml/2006/main">
               <a:ext uri="{FF2B5EF4-FFF2-40B4-BE49-F238E27FC236}">
-                <a16:creationId xmlns:a16="http://schemas.microsoft.com/office/drawing/2014/main" id="{E24E365B-BB01-43F0-BB39-71693F01297C}"/>
+                <a16:creationId xmlns:a16="http://schemas.microsoft.com/office/drawing/2014/main" id="{43E5E8D8-6770-472A-9961-2DABAD5F4479}"/>
               </a:ext>
             </a:extLst>
           </p:cNvPr>
@@ -10383,7 +10383,7 @@
           <p:cNvPr id="11" name="">
             <a:extLst xmlns:a="http://schemas.openxmlformats.org/drawingml/2006/main">
               <a:ext uri="{FF2B5EF4-FFF2-40B4-BE49-F238E27FC236}">
-                <a16:creationId xmlns:a16="http://schemas.microsoft.com/office/drawing/2014/main" id="{6BFEC53F-B99A-472D-A219-55C6130C280D}"/>
+                <a16:creationId xmlns:a16="http://schemas.microsoft.com/office/drawing/2014/main" id="{466E7118-9BB7-475E-9D93-28039A1BFB22}"/>
               </a:ext>
             </a:extLst>
           </p:cNvPr>
@@ -10418,7 +10418,7 @@
           <p:cNvPr id="12" name="">
             <a:extLst xmlns:a="http://schemas.openxmlformats.org/drawingml/2006/main">
               <a:ext uri="{FF2B5EF4-FFF2-40B4-BE49-F238E27FC236}">
-                <a16:creationId xmlns:a16="http://schemas.microsoft.com/office/drawing/2014/main" id="{C6391CC5-A405-47D0-B637-1EF76EF585F5}"/>
+                <a16:creationId xmlns:a16="http://schemas.microsoft.com/office/drawing/2014/main" id="{AD36F928-13F2-435C-9D0A-05BE5CA9571B}"/>
               </a:ext>
             </a:extLst>
           </p:cNvPr>
@@ -10476,7 +10476,7 @@
           <p:cNvPr id="13" name="">
             <a:extLst xmlns:a="http://schemas.openxmlformats.org/drawingml/2006/main">
               <a:ext uri="{FF2B5EF4-FFF2-40B4-BE49-F238E27FC236}">
-                <a16:creationId xmlns:a16="http://schemas.microsoft.com/office/drawing/2014/main" id="{E6338150-BBDC-4950-AA62-6ED3EB570804}"/>
+                <a16:creationId xmlns:a16="http://schemas.microsoft.com/office/drawing/2014/main" id="{1D5DEF0D-9808-4431-AADB-BEEB41443177}"/>
               </a:ext>
             </a:extLst>
           </p:cNvPr>
@@ -10568,7 +10568,7 @@
           <p:cNvPr id="14" name="">
             <a:extLst xmlns:a="http://schemas.openxmlformats.org/drawingml/2006/main">
               <a:ext uri="{FF2B5EF4-FFF2-40B4-BE49-F238E27FC236}">
-                <a16:creationId xmlns:a16="http://schemas.microsoft.com/office/drawing/2014/main" id="{EB71C677-7AF8-4DD1-A6AC-5BE3C3BEAB59}"/>
+                <a16:creationId xmlns:a16="http://schemas.microsoft.com/office/drawing/2014/main" id="{44198E06-45CA-4504-85A0-E45AB7B20127}"/>
               </a:ext>
             </a:extLst>
           </p:cNvPr>
@@ -10601,7 +10601,7 @@
           <p:cNvPr id="15" name="">
             <a:extLst xmlns:a="http://schemas.openxmlformats.org/drawingml/2006/main">
               <a:ext uri="{FF2B5EF4-FFF2-40B4-BE49-F238E27FC236}">
-                <a16:creationId xmlns:a16="http://schemas.microsoft.com/office/drawing/2014/main" id="{0EA0DCB3-2C5B-41D6-9554-92F4483E96B7}"/>
+                <a16:creationId xmlns:a16="http://schemas.microsoft.com/office/drawing/2014/main" id="{2EC4BD88-BD18-464F-BB1D-1B233A175AD0}"/>
               </a:ext>
             </a:extLst>
           </p:cNvPr>
@@ -10636,7 +10636,7 @@
           <p:cNvPr id="16" name="">
             <a:extLst xmlns:a="http://schemas.openxmlformats.org/drawingml/2006/main">
               <a:ext uri="{FF2B5EF4-FFF2-40B4-BE49-F238E27FC236}">
-                <a16:creationId xmlns:a16="http://schemas.microsoft.com/office/drawing/2014/main" id="{01AC8DFD-7C89-4F12-95E8-AF8F9643CDD8}"/>
+                <a16:creationId xmlns:a16="http://schemas.microsoft.com/office/drawing/2014/main" id="{58D3DBB8-5AB7-43C5-BC63-C77AAFAF9E9D}"/>
               </a:ext>
             </a:extLst>
           </p:cNvPr>
@@ -10694,7 +10694,7 @@
           <p:cNvPr id="17" name="">
             <a:extLst xmlns:a="http://schemas.openxmlformats.org/drawingml/2006/main">
               <a:ext uri="{FF2B5EF4-FFF2-40B4-BE49-F238E27FC236}">
-                <a16:creationId xmlns:a16="http://schemas.microsoft.com/office/drawing/2014/main" id="{111C35A9-1253-4CC2-AC89-E938633EAE5A}"/>
+                <a16:creationId xmlns:a16="http://schemas.microsoft.com/office/drawing/2014/main" id="{DF770EA0-3CA6-4980-AAB8-BFBB33064F24}"/>
               </a:ext>
             </a:extLst>
           </p:cNvPr>
@@ -10786,7 +10786,7 @@
           <p:cNvPr id="18" name="">
             <a:extLst xmlns:a="http://schemas.openxmlformats.org/drawingml/2006/main">
               <a:ext uri="{FF2B5EF4-FFF2-40B4-BE49-F238E27FC236}">
-                <a16:creationId xmlns:a16="http://schemas.microsoft.com/office/drawing/2014/main" id="{DEC35BDB-FE4E-4330-8AB4-AB3552E98873}"/>
+                <a16:creationId xmlns:a16="http://schemas.microsoft.com/office/drawing/2014/main" id="{905D9452-4543-4837-9559-6735C0D013A3}"/>
               </a:ext>
             </a:extLst>
           </p:cNvPr>
@@ -10819,7 +10819,7 @@
           <p:cNvPr id="19" name="">
             <a:extLst xmlns:a="http://schemas.openxmlformats.org/drawingml/2006/main">
               <a:ext uri="{FF2B5EF4-FFF2-40B4-BE49-F238E27FC236}">
-                <a16:creationId xmlns:a16="http://schemas.microsoft.com/office/drawing/2014/main" id="{A898D413-CDCB-4EE1-A491-A10DFAE94908}"/>
+                <a16:creationId xmlns:a16="http://schemas.microsoft.com/office/drawing/2014/main" id="{40CA8AD9-6126-4D9A-970D-E7F6835AD441}"/>
               </a:ext>
             </a:extLst>
           </p:cNvPr>
@@ -10854,7 +10854,7 @@
           <p:cNvPr id="20" name="">
             <a:extLst xmlns:a="http://schemas.openxmlformats.org/drawingml/2006/main">
               <a:ext uri="{FF2B5EF4-FFF2-40B4-BE49-F238E27FC236}">
-                <a16:creationId xmlns:a16="http://schemas.microsoft.com/office/drawing/2014/main" id="{74EDDD44-6E9A-40D6-89D9-A78120AD284C}"/>
+                <a16:creationId xmlns:a16="http://schemas.microsoft.com/office/drawing/2014/main" id="{1E569303-D95F-4236-8C80-433ECFEFC733}"/>
               </a:ext>
             </a:extLst>
           </p:cNvPr>
@@ -10912,7 +10912,7 @@
           <p:cNvPr id="21" name="">
             <a:extLst xmlns:a="http://schemas.openxmlformats.org/drawingml/2006/main">
               <a:ext uri="{FF2B5EF4-FFF2-40B4-BE49-F238E27FC236}">
-                <a16:creationId xmlns:a16="http://schemas.microsoft.com/office/drawing/2014/main" id="{8221300C-64D8-4013-B873-21B91C79588C}"/>
+                <a16:creationId xmlns:a16="http://schemas.microsoft.com/office/drawing/2014/main" id="{3B96179D-508E-42E1-A5DE-62744C609896}"/>
               </a:ext>
             </a:extLst>
           </p:cNvPr>
@@ -11002,7 +11002,7 @@
     </p:spTree>
     <p:extLst>
       <p:ext uri="{BB962C8B-B14F-4D97-AF65-F5344CB8AC3E}">
-        <p14:creationId xmlns:p14="http://schemas.microsoft.com/office/powerpoint/2010/main" val="398416273"/>
+        <p14:creationId xmlns:p14="http://schemas.microsoft.com/office/powerpoint/2010/main" val="730907421"/>
       </p:ext>
     </p:extLst>
   </p:cSld>
@@ -11015,7 +11015,7 @@
     <p:bg>
       <p:bgPr>
         <a:solidFill xmlns:a="http://schemas.openxmlformats.org/drawingml/2006/main">
-          <a:srgbClr val="0E1B3E"/>
+          <a:srgbClr val="070F26"/>
         </a:solidFill>
       </p:bgPr>
     </p:bg>
@@ -11033,7 +11033,7 @@
           <p:cNvPr id="1" name="">
             <a:extLst xmlns:a="http://schemas.openxmlformats.org/drawingml/2006/main">
               <a:ext uri="{FF2B5EF4-FFF2-40B4-BE49-F238E27FC236}">
-                <a16:creationId xmlns:a16="http://schemas.microsoft.com/office/drawing/2014/main" id="{A64FF5D7-6430-42F5-AD56-1F29021B915B}"/>
+                <a16:creationId xmlns:a16="http://schemas.microsoft.com/office/drawing/2014/main" id="{5F275612-A9E1-478D-9FCC-31EB040123AA}"/>
               </a:ext>
             </a:extLst>
           </p:cNvPr>
@@ -11051,7 +11051,7 @@
             <a:avLst/>
           </a:prstGeom>
           <a:solidFill xmlns:a="http://schemas.openxmlformats.org/drawingml/2006/main">
-            <a:srgbClr val="0E1B3E"/>
+            <a:srgbClr val="070F26"/>
           </a:solidFill>
           <a:ln xmlns:a="http://schemas.openxmlformats.org/drawingml/2006/main" w="0">
             <a:solidFill>
@@ -11072,7 +11072,7 @@
           <p:nvPr/>
         </p:nvPicPr>
         <p:blipFill>
-          <a:blip xmlns:r="http://schemas.openxmlformats.org/officeDocument/2006/relationships" xmlns:a="http://schemas.openxmlformats.org/drawingml/2006/main" r:embed="R74a66fa01bc64c7f"/>
+          <a:blip xmlns:r="http://schemas.openxmlformats.org/officeDocument/2006/relationships" xmlns:a="http://schemas.openxmlformats.org/drawingml/2006/main" r:embed="R27222c934efb4d7b"/>
           <a:stretch xmlns:a="http://schemas.openxmlformats.org/drawingml/2006/main"/>
         </p:blipFill>
         <p:spPr>
@@ -11090,7 +11090,7 @@
           <p:cNvPr id="3" name="">
             <a:extLst xmlns:a="http://schemas.openxmlformats.org/drawingml/2006/main">
               <a:ext uri="{FF2B5EF4-FFF2-40B4-BE49-F238E27FC236}">
-                <a16:creationId xmlns:a16="http://schemas.microsoft.com/office/drawing/2014/main" id="{E4136DB6-6E08-4648-B1BE-48D3C11A31AB}"/>
+                <a16:creationId xmlns:a16="http://schemas.microsoft.com/office/drawing/2014/main" id="{0AF71E39-E199-4CE3-A539-545DA99DE4B0}"/>
               </a:ext>
             </a:extLst>
           </p:cNvPr>
@@ -11148,7 +11148,7 @@
           <p:cNvPr id="4" name="">
             <a:extLst xmlns:a="http://schemas.openxmlformats.org/drawingml/2006/main">
               <a:ext uri="{FF2B5EF4-FFF2-40B4-BE49-F238E27FC236}">
-                <a16:creationId xmlns:a16="http://schemas.microsoft.com/office/drawing/2014/main" id="{822CC496-E559-43C7-91AF-7D1D4E591743}"/>
+                <a16:creationId xmlns:a16="http://schemas.microsoft.com/office/drawing/2014/main" id="{392B6EA0-8B97-47F9-9A24-6CB29F2A6CAF}"/>
               </a:ext>
             </a:extLst>
           </p:cNvPr>
@@ -11206,7 +11206,7 @@
           <p:cNvPr id="5" name="">
             <a:extLst xmlns:a="http://schemas.openxmlformats.org/drawingml/2006/main">
               <a:ext uri="{FF2B5EF4-FFF2-40B4-BE49-F238E27FC236}">
-                <a16:creationId xmlns:a16="http://schemas.microsoft.com/office/drawing/2014/main" id="{7D3A10F6-CA18-48F4-80BC-A162C36DBFC8}"/>
+                <a16:creationId xmlns:a16="http://schemas.microsoft.com/office/drawing/2014/main" id="{02A1E5FE-EC0B-476D-A147-92157494FAA8}"/>
               </a:ext>
             </a:extLst>
           </p:cNvPr>
@@ -11264,7 +11264,7 @@
           <p:cNvPr id="6" name="">
             <a:extLst xmlns:a="http://schemas.openxmlformats.org/drawingml/2006/main">
               <a:ext uri="{FF2B5EF4-FFF2-40B4-BE49-F238E27FC236}">
-                <a16:creationId xmlns:a16="http://schemas.microsoft.com/office/drawing/2014/main" id="{6BB32AD9-FF48-4396-A43F-7DE17DB4BDCA}"/>
+                <a16:creationId xmlns:a16="http://schemas.microsoft.com/office/drawing/2014/main" id="{9EA37E58-1796-4947-9B94-F61F05A540E7}"/>
               </a:ext>
             </a:extLst>
           </p:cNvPr>
@@ -11326,13 +11326,13 @@
           <p:nvPr/>
         </p:nvPicPr>
         <p:blipFill>
-          <a:blip xmlns:r="http://schemas.openxmlformats.org/officeDocument/2006/relationships" xmlns:a="http://schemas.openxmlformats.org/drawingml/2006/main" r:embed="Re56bc8f9585545c8"/>
+          <a:blip xmlns:r="http://schemas.openxmlformats.org/officeDocument/2006/relationships" xmlns:a="http://schemas.openxmlformats.org/drawingml/2006/main" r:embed="Ra9d1bcc1b7a8475b"/>
           <a:stretch xmlns:a="http://schemas.openxmlformats.org/drawingml/2006/main"/>
         </p:blipFill>
         <p:spPr>
           <a:xfrm xmlns:a="http://schemas.openxmlformats.org/drawingml/2006/main">
-            <a:off x="476250" y="1257300"/>
-            <a:ext cx="2667000" cy="4533900"/>
+            <a:off x="0" y="1746250"/>
+            <a:ext cx="2667000" cy="3556000"/>
           </a:xfrm>
           <a:prstGeom xmlns:a="http://schemas.openxmlformats.org/drawingml/2006/main" prst="rect">
             <a:avLst/>
@@ -11344,7 +11344,7 @@
           <p:cNvPr id="8" name="">
             <a:extLst xmlns:a="http://schemas.openxmlformats.org/drawingml/2006/main">
               <a:ext uri="{FF2B5EF4-FFF2-40B4-BE49-F238E27FC236}">
-                <a16:creationId xmlns:a16="http://schemas.microsoft.com/office/drawing/2014/main" id="{D80BB320-F879-4728-8254-37908EC3BDCF}"/>
+                <a16:creationId xmlns:a16="http://schemas.microsoft.com/office/drawing/2014/main" id="{10D487E9-0E61-42B9-A37D-019C14F19671}"/>
               </a:ext>
             </a:extLst>
           </p:cNvPr>
@@ -11402,7 +11402,7 @@
           <p:cNvPr id="9" name="">
             <a:extLst xmlns:a="http://schemas.openxmlformats.org/drawingml/2006/main">
               <a:ext uri="{FF2B5EF4-FFF2-40B4-BE49-F238E27FC236}">
-                <a16:creationId xmlns:a16="http://schemas.microsoft.com/office/drawing/2014/main" id="{372C833A-F8FC-416D-A3C8-42444AE99A42}"/>
+                <a16:creationId xmlns:a16="http://schemas.microsoft.com/office/drawing/2014/main" id="{31BE98B2-0546-46B4-9B6E-DD73456AC0B3}"/>
               </a:ext>
             </a:extLst>
           </p:cNvPr>
@@ -11460,7 +11460,7 @@
           <p:cNvPr id="10" name="">
             <a:extLst xmlns:a="http://schemas.openxmlformats.org/drawingml/2006/main">
               <a:ext uri="{FF2B5EF4-FFF2-40B4-BE49-F238E27FC236}">
-                <a16:creationId xmlns:a16="http://schemas.microsoft.com/office/drawing/2014/main" id="{1EDC74CC-E13A-4CF6-A283-09F167FD768D}"/>
+                <a16:creationId xmlns:a16="http://schemas.microsoft.com/office/drawing/2014/main" id="{88DCB241-BC0A-4E88-BE09-0CDD77C6A4EB}"/>
               </a:ext>
             </a:extLst>
           </p:cNvPr>
@@ -11516,7 +11516,7 @@
     </p:spTree>
     <p:extLst>
       <p:ext uri="{BB962C8B-B14F-4D97-AF65-F5344CB8AC3E}">
-        <p14:creationId xmlns:p14="http://schemas.microsoft.com/office/powerpoint/2010/main" val="1392916287"/>
+        <p14:creationId xmlns:p14="http://schemas.microsoft.com/office/powerpoint/2010/main" val="1885476186"/>
       </p:ext>
     </p:extLst>
   </p:cSld>
@@ -11547,7 +11547,7 @@
           <p:cNvPr id="1" name="">
             <a:extLst xmlns:a="http://schemas.openxmlformats.org/drawingml/2006/main">
               <a:ext uri="{FF2B5EF4-FFF2-40B4-BE49-F238E27FC236}">
-                <a16:creationId xmlns:a16="http://schemas.microsoft.com/office/drawing/2014/main" id="{DEC7B9EF-A11D-40FE-9DF8-C38E2056A707}"/>
+                <a16:creationId xmlns:a16="http://schemas.microsoft.com/office/drawing/2014/main" id="{1A232E9F-1740-4E81-B875-B26432834504}"/>
               </a:ext>
             </a:extLst>
           </p:cNvPr>
@@ -11586,7 +11586,7 @@
           <p:nvPr/>
         </p:nvPicPr>
         <p:blipFill>
-          <a:blip xmlns:r="http://schemas.openxmlformats.org/officeDocument/2006/relationships" xmlns:a="http://schemas.openxmlformats.org/drawingml/2006/main" r:embed="Ra7ba46be66f14878"/>
+          <a:blip xmlns:r="http://schemas.openxmlformats.org/officeDocument/2006/relationships" xmlns:a="http://schemas.openxmlformats.org/drawingml/2006/main" r:embed="Rff2790c130d34682"/>
           <a:stretch xmlns:a="http://schemas.openxmlformats.org/drawingml/2006/main"/>
         </p:blipFill>
         <p:spPr>
@@ -11604,7 +11604,7 @@
           <p:cNvPr id="3" name="">
             <a:extLst xmlns:a="http://schemas.openxmlformats.org/drawingml/2006/main">
               <a:ext uri="{FF2B5EF4-FFF2-40B4-BE49-F238E27FC236}">
-                <a16:creationId xmlns:a16="http://schemas.microsoft.com/office/drawing/2014/main" id="{5D82A6C0-8CD2-4CC3-BC4B-FE320B1389D2}"/>
+                <a16:creationId xmlns:a16="http://schemas.microsoft.com/office/drawing/2014/main" id="{1A1476EF-F201-4CC6-9EA2-BA4440072D85}"/>
               </a:ext>
             </a:extLst>
           </p:cNvPr>
@@ -11642,14 +11642,14 @@
             <a:pPr algn="r">
               <a:defRPr sz="825" b="1">
                 <a:solidFill>
-                  <a:srgbClr val="0E1B3E"/>
+                  <a:srgbClr val="070F26"/>
                 </a:solidFill>
               </a:defRPr>
             </a:pPr>
             <a:r>
               <a:rPr sz="825" b="1">
                 <a:solidFill>
-                  <a:srgbClr val="0E1B3E"/>
+                  <a:srgbClr val="070F26"/>
                 </a:solidFill>
               </a:rPr>
               <a:t>NTT DATA UNIVERSITY</a:t>
@@ -11662,7 +11662,7 @@
           <p:cNvPr id="4" name="">
             <a:extLst xmlns:a="http://schemas.openxmlformats.org/drawingml/2006/main">
               <a:ext uri="{FF2B5EF4-FFF2-40B4-BE49-F238E27FC236}">
-                <a16:creationId xmlns:a16="http://schemas.microsoft.com/office/drawing/2014/main" id="{B296EEA0-86C7-4AE8-ACED-5B29D9B24837}"/>
+                <a16:creationId xmlns:a16="http://schemas.microsoft.com/office/drawing/2014/main" id="{BABECF56-7288-4589-B6C6-6325E04C3AC9}"/>
               </a:ext>
             </a:extLst>
           </p:cNvPr>
@@ -11720,7 +11720,7 @@
           <p:cNvPr id="5" name="">
             <a:extLst xmlns:a="http://schemas.openxmlformats.org/drawingml/2006/main">
               <a:ext uri="{FF2B5EF4-FFF2-40B4-BE49-F238E27FC236}">
-                <a16:creationId xmlns:a16="http://schemas.microsoft.com/office/drawing/2014/main" id="{F2C1A9EE-46B7-46DF-A236-03931BD46E18}"/>
+                <a16:creationId xmlns:a16="http://schemas.microsoft.com/office/drawing/2014/main" id="{1D58A78E-C649-44E1-82E9-EC4B6574690B}"/>
               </a:ext>
             </a:extLst>
           </p:cNvPr>
@@ -11778,7 +11778,7 @@
           <p:cNvPr id="6" name="">
             <a:extLst xmlns:a="http://schemas.openxmlformats.org/drawingml/2006/main">
               <a:ext uri="{FF2B5EF4-FFF2-40B4-BE49-F238E27FC236}">
-                <a16:creationId xmlns:a16="http://schemas.microsoft.com/office/drawing/2014/main" id="{2AD9D201-D1ED-489F-A2EA-4C0E70CD985A}"/>
+                <a16:creationId xmlns:a16="http://schemas.microsoft.com/office/drawing/2014/main" id="{757310D3-0F37-436D-8D8B-46B2A1F2A686}"/>
               </a:ext>
             </a:extLst>
           </p:cNvPr>
@@ -11816,14 +11816,14 @@
             <a:pPr algn="r">
               <a:defRPr sz="675" b="1">
                 <a:solidFill>
-                  <a:srgbClr val="0E1B3E"/>
+                  <a:srgbClr val="070F26"/>
                 </a:solidFill>
               </a:defRPr>
             </a:pPr>
             <a:r>
               <a:rPr sz="675" b="1">
                 <a:solidFill>
-                  <a:srgbClr val="0E1B3E"/>
+                  <a:srgbClr val="070F26"/>
                 </a:solidFill>
               </a:rPr>
               <a:t>NTT DATA UNIVERSITY</a:t>
@@ -11836,7 +11836,7 @@
           <p:cNvPr id="7" name="">
             <a:extLst xmlns:a="http://schemas.openxmlformats.org/drawingml/2006/main">
               <a:ext uri="{FF2B5EF4-FFF2-40B4-BE49-F238E27FC236}">
-                <a16:creationId xmlns:a16="http://schemas.microsoft.com/office/drawing/2014/main" id="{81F70F58-D649-4208-8BE6-38D06AF6BB11}"/>
+                <a16:creationId xmlns:a16="http://schemas.microsoft.com/office/drawing/2014/main" id="{4A640F22-D3C4-4C96-83DF-3045A6163F74}"/>
               </a:ext>
             </a:extLst>
           </p:cNvPr>
@@ -11894,7 +11894,7 @@
           <p:cNvPr id="8" name="">
             <a:extLst xmlns:a="http://schemas.openxmlformats.org/drawingml/2006/main">
               <a:ext uri="{FF2B5EF4-FFF2-40B4-BE49-F238E27FC236}">
-                <a16:creationId xmlns:a16="http://schemas.microsoft.com/office/drawing/2014/main" id="{FFEB71F8-0B45-431B-AA49-C184A4E4A48D}"/>
+                <a16:creationId xmlns:a16="http://schemas.microsoft.com/office/drawing/2014/main" id="{55BA8123-BC0C-40D2-8684-1163DDB16DDF}"/>
               </a:ext>
             </a:extLst>
           </p:cNvPr>
@@ -11932,14 +11932,14 @@
             <a:pPr algn="l">
               <a:defRPr sz="2400" b="0">
                 <a:solidFill>
-                  <a:srgbClr val="0E1B3E"/>
+                  <a:srgbClr val="070F26"/>
                 </a:solidFill>
               </a:defRPr>
             </a:pPr>
             <a:r>
               <a:rPr sz="2400" b="0">
                 <a:solidFill>
-                  <a:srgbClr val="0E1B3E"/>
+                  <a:srgbClr val="070F26"/>
                 </a:solidFill>
               </a:rPr>
               <a:t>Cada um propõe, depois discutimos coletivamente</a:t>
@@ -11952,7 +11952,7 @@
           <p:cNvPr id="9" name="">
             <a:extLst xmlns:a="http://schemas.openxmlformats.org/drawingml/2006/main">
               <a:ext uri="{FF2B5EF4-FFF2-40B4-BE49-F238E27FC236}">
-                <a16:creationId xmlns:a16="http://schemas.microsoft.com/office/drawing/2014/main" id="{FEBDDBDC-C62D-482A-94D7-0FD9F2018D22}"/>
+                <a16:creationId xmlns:a16="http://schemas.microsoft.com/office/drawing/2014/main" id="{6166A79F-59FE-40D3-BCD6-6C2A617EA023}"/>
               </a:ext>
             </a:extLst>
           </p:cNvPr>
@@ -12010,7 +12010,7 @@
           <p:cNvPr id="10" name="">
             <a:extLst xmlns:a="http://schemas.openxmlformats.org/drawingml/2006/main">
               <a:ext uri="{FF2B5EF4-FFF2-40B4-BE49-F238E27FC236}">
-                <a16:creationId xmlns:a16="http://schemas.microsoft.com/office/drawing/2014/main" id="{BEA47119-C12F-44E8-90BD-39BA6F173398}"/>
+                <a16:creationId xmlns:a16="http://schemas.microsoft.com/office/drawing/2014/main" id="{4CE1AE68-8006-4415-A6B1-8D985D7B4CDD}"/>
               </a:ext>
             </a:extLst>
           </p:cNvPr>
@@ -12043,7 +12043,7 @@
           <p:cNvPr id="11" name="">
             <a:extLst xmlns:a="http://schemas.openxmlformats.org/drawingml/2006/main">
               <a:ext uri="{FF2B5EF4-FFF2-40B4-BE49-F238E27FC236}">
-                <a16:creationId xmlns:a16="http://schemas.microsoft.com/office/drawing/2014/main" id="{DFACC305-47D8-412C-AB1E-FE9469B6B142}"/>
+                <a16:creationId xmlns:a16="http://schemas.microsoft.com/office/drawing/2014/main" id="{DC85597D-CA08-4100-8FE6-7C541DD41ACB}"/>
               </a:ext>
             </a:extLst>
           </p:cNvPr>
@@ -12078,7 +12078,7 @@
           <p:cNvPr id="12" name="">
             <a:extLst xmlns:a="http://schemas.openxmlformats.org/drawingml/2006/main">
               <a:ext uri="{FF2B5EF4-FFF2-40B4-BE49-F238E27FC236}">
-                <a16:creationId xmlns:a16="http://schemas.microsoft.com/office/drawing/2014/main" id="{63AF5732-56C4-4AF0-9273-7859F33B853A}"/>
+                <a16:creationId xmlns:a16="http://schemas.microsoft.com/office/drawing/2014/main" id="{812AC77B-233C-46FD-AF35-B0D50D57A019}"/>
               </a:ext>
             </a:extLst>
           </p:cNvPr>
@@ -12136,7 +12136,7 @@
           <p:cNvPr id="13" name="">
             <a:extLst xmlns:a="http://schemas.openxmlformats.org/drawingml/2006/main">
               <a:ext uri="{FF2B5EF4-FFF2-40B4-BE49-F238E27FC236}">
-                <a16:creationId xmlns:a16="http://schemas.microsoft.com/office/drawing/2014/main" id="{C126B71A-1EA7-45D6-B022-F0E411368F5D}"/>
+                <a16:creationId xmlns:a16="http://schemas.microsoft.com/office/drawing/2014/main" id="{1A36FBC6-FA5C-4AAB-B5CB-7547F6F593B0}"/>
               </a:ext>
             </a:extLst>
           </p:cNvPr>
@@ -12174,14 +12174,14 @@
             <a:pPr algn="l">
               <a:defRPr sz="1050" b="1">
                 <a:solidFill>
-                  <a:srgbClr val="0E1B3E"/>
+                  <a:srgbClr val="070F26"/>
                 </a:solidFill>
               </a:defRPr>
             </a:pPr>
             <a:r>
               <a:rPr sz="1050" b="1">
                 <a:solidFill>
-                  <a:srgbClr val="0E1B3E"/>
+                  <a:srgbClr val="070F26"/>
                 </a:solidFill>
               </a:rPr>
               <a:t>Individual — 10 min</a:t>
@@ -12194,7 +12194,7 @@
           <p:cNvPr id="14" name="">
             <a:extLst xmlns:a="http://schemas.openxmlformats.org/drawingml/2006/main">
               <a:ext uri="{FF2B5EF4-FFF2-40B4-BE49-F238E27FC236}">
-                <a16:creationId xmlns:a16="http://schemas.microsoft.com/office/drawing/2014/main" id="{0C31BEDF-65E7-48B3-82A3-00F9AA02CD7D}"/>
+                <a16:creationId xmlns:a16="http://schemas.microsoft.com/office/drawing/2014/main" id="{3B4CFA20-BFC6-4D87-BD8F-A370596C0CDC}"/>
               </a:ext>
             </a:extLst>
           </p:cNvPr>
@@ -12286,7 +12286,7 @@
           <p:cNvPr id="15" name="">
             <a:extLst xmlns:a="http://schemas.openxmlformats.org/drawingml/2006/main">
               <a:ext uri="{FF2B5EF4-FFF2-40B4-BE49-F238E27FC236}">
-                <a16:creationId xmlns:a16="http://schemas.microsoft.com/office/drawing/2014/main" id="{30077244-1622-4CE6-AD83-8B41E44068C3}"/>
+                <a16:creationId xmlns:a16="http://schemas.microsoft.com/office/drawing/2014/main" id="{FFFAE6C3-A550-4EA3-B797-5C9BF66193EE}"/>
               </a:ext>
             </a:extLst>
           </p:cNvPr>
@@ -12319,7 +12319,7 @@
           <p:cNvPr id="16" name="">
             <a:extLst xmlns:a="http://schemas.openxmlformats.org/drawingml/2006/main">
               <a:ext uri="{FF2B5EF4-FFF2-40B4-BE49-F238E27FC236}">
-                <a16:creationId xmlns:a16="http://schemas.microsoft.com/office/drawing/2014/main" id="{4E9FC32F-A3A3-4CFF-BB39-4C1A819643C0}"/>
+                <a16:creationId xmlns:a16="http://schemas.microsoft.com/office/drawing/2014/main" id="{784B2C47-D64E-4F9F-A97E-2EB26C610CE7}"/>
               </a:ext>
             </a:extLst>
           </p:cNvPr>
@@ -12354,7 +12354,7 @@
           <p:cNvPr id="17" name="">
             <a:extLst xmlns:a="http://schemas.openxmlformats.org/drawingml/2006/main">
               <a:ext uri="{FF2B5EF4-FFF2-40B4-BE49-F238E27FC236}">
-                <a16:creationId xmlns:a16="http://schemas.microsoft.com/office/drawing/2014/main" id="{8F1CA4B1-31B1-47A0-AA59-E05E594EE2A5}"/>
+                <a16:creationId xmlns:a16="http://schemas.microsoft.com/office/drawing/2014/main" id="{A379FA65-7F8B-491A-A5A9-71AF9DD8944A}"/>
               </a:ext>
             </a:extLst>
           </p:cNvPr>
@@ -12412,7 +12412,7 @@
           <p:cNvPr id="18" name="">
             <a:extLst xmlns:a="http://schemas.openxmlformats.org/drawingml/2006/main">
               <a:ext uri="{FF2B5EF4-FFF2-40B4-BE49-F238E27FC236}">
-                <a16:creationId xmlns:a16="http://schemas.microsoft.com/office/drawing/2014/main" id="{8C4C168E-7497-4D11-ACDF-41198B77E36B}"/>
+                <a16:creationId xmlns:a16="http://schemas.microsoft.com/office/drawing/2014/main" id="{7B99097B-8EFB-4A84-B87A-A6A6C9EFBABA}"/>
               </a:ext>
             </a:extLst>
           </p:cNvPr>
@@ -12450,14 +12450,14 @@
             <a:pPr algn="l">
               <a:defRPr sz="1050" b="1">
                 <a:solidFill>
-                  <a:srgbClr val="0E1B3E"/>
+                  <a:srgbClr val="070F26"/>
                 </a:solidFill>
               </a:defRPr>
             </a:pPr>
             <a:r>
               <a:rPr sz="1050" b="1">
                 <a:solidFill>
-                  <a:srgbClr val="0E1B3E"/>
+                  <a:srgbClr val="070F26"/>
                 </a:solidFill>
               </a:rPr>
               <a:t>Discussão — 20 min</a:t>
@@ -12470,7 +12470,7 @@
           <p:cNvPr id="19" name="">
             <a:extLst xmlns:a="http://schemas.openxmlformats.org/drawingml/2006/main">
               <a:ext uri="{FF2B5EF4-FFF2-40B4-BE49-F238E27FC236}">
-                <a16:creationId xmlns:a16="http://schemas.microsoft.com/office/drawing/2014/main" id="{3AEE583C-9572-462D-BE23-923918F40066}"/>
+                <a16:creationId xmlns:a16="http://schemas.microsoft.com/office/drawing/2014/main" id="{F926A8D3-550F-4BD1-A901-7544F278603C}"/>
               </a:ext>
             </a:extLst>
           </p:cNvPr>
@@ -12545,7 +12545,7 @@
           <p:cNvPr id="20" name="">
             <a:extLst xmlns:a="http://schemas.openxmlformats.org/drawingml/2006/main">
               <a:ext uri="{FF2B5EF4-FFF2-40B4-BE49-F238E27FC236}">
-                <a16:creationId xmlns:a16="http://schemas.microsoft.com/office/drawing/2014/main" id="{353606AD-6657-4A72-8233-7C2275DF48F0}"/>
+                <a16:creationId xmlns:a16="http://schemas.microsoft.com/office/drawing/2014/main" id="{85F57E98-B06F-4DCC-908E-28EF533BEC03}"/>
               </a:ext>
             </a:extLst>
           </p:cNvPr>
@@ -12578,7 +12578,7 @@
           <p:cNvPr id="21" name="">
             <a:extLst xmlns:a="http://schemas.openxmlformats.org/drawingml/2006/main">
               <a:ext uri="{FF2B5EF4-FFF2-40B4-BE49-F238E27FC236}">
-                <a16:creationId xmlns:a16="http://schemas.microsoft.com/office/drawing/2014/main" id="{BDE3FED8-9CCF-48AA-8DB7-9E304CCD0078}"/>
+                <a16:creationId xmlns:a16="http://schemas.microsoft.com/office/drawing/2014/main" id="{9E7A807B-7AA2-427B-A340-F71B4027D102}"/>
               </a:ext>
             </a:extLst>
           </p:cNvPr>
@@ -12613,7 +12613,7 @@
           <p:cNvPr id="22" name="">
             <a:extLst xmlns:a="http://schemas.openxmlformats.org/drawingml/2006/main">
               <a:ext uri="{FF2B5EF4-FFF2-40B4-BE49-F238E27FC236}">
-                <a16:creationId xmlns:a16="http://schemas.microsoft.com/office/drawing/2014/main" id="{42B86FFC-CFA7-47F2-8680-5751B0440133}"/>
+                <a16:creationId xmlns:a16="http://schemas.microsoft.com/office/drawing/2014/main" id="{0B8A1016-9B87-476D-AA25-EB05A69F788A}"/>
               </a:ext>
             </a:extLst>
           </p:cNvPr>
@@ -12671,7 +12671,7 @@
           <p:cNvPr id="23" name="">
             <a:extLst xmlns:a="http://schemas.openxmlformats.org/drawingml/2006/main">
               <a:ext uri="{FF2B5EF4-FFF2-40B4-BE49-F238E27FC236}">
-                <a16:creationId xmlns:a16="http://schemas.microsoft.com/office/drawing/2014/main" id="{E729087A-E87A-41F5-B831-D170E2E1EF84}"/>
+                <a16:creationId xmlns:a16="http://schemas.microsoft.com/office/drawing/2014/main" id="{E5243BA8-F406-4D10-A997-7FAF6C603446}"/>
               </a:ext>
             </a:extLst>
           </p:cNvPr>
@@ -12709,14 +12709,14 @@
             <a:pPr algn="l">
               <a:defRPr sz="1050" b="1">
                 <a:solidFill>
-                  <a:srgbClr val="0E1B3E"/>
+                  <a:srgbClr val="070F26"/>
                 </a:solidFill>
               </a:defRPr>
             </a:pPr>
             <a:r>
               <a:rPr sz="1050" b="1">
                 <a:solidFill>
-                  <a:srgbClr val="0E1B3E"/>
+                  <a:srgbClr val="070F26"/>
                 </a:solidFill>
               </a:rPr>
               <a:t>Gabarito — 5 min</a:t>
@@ -12729,7 +12729,7 @@
           <p:cNvPr id="24" name="">
             <a:extLst xmlns:a="http://schemas.openxmlformats.org/drawingml/2006/main">
               <a:ext uri="{FF2B5EF4-FFF2-40B4-BE49-F238E27FC236}">
-                <a16:creationId xmlns:a16="http://schemas.microsoft.com/office/drawing/2014/main" id="{058701D2-0747-4DFA-8F90-96138FE86754}"/>
+                <a16:creationId xmlns:a16="http://schemas.microsoft.com/office/drawing/2014/main" id="{964E9301-6D3A-4DE9-A45B-0752BF67B0E1}"/>
               </a:ext>
             </a:extLst>
           </p:cNvPr>
@@ -12836,7 +12836,7 @@
     </p:spTree>
     <p:extLst>
       <p:ext uri="{BB962C8B-B14F-4D97-AF65-F5344CB8AC3E}">
-        <p14:creationId xmlns:p14="http://schemas.microsoft.com/office/powerpoint/2010/main" val="1426488866"/>
+        <p14:creationId xmlns:p14="http://schemas.microsoft.com/office/powerpoint/2010/main" val="1681924478"/>
       </p:ext>
     </p:extLst>
   </p:cSld>
@@ -12867,7 +12867,7 @@
           <p:cNvPr id="1" name="">
             <a:extLst xmlns:a="http://schemas.openxmlformats.org/drawingml/2006/main">
               <a:ext uri="{FF2B5EF4-FFF2-40B4-BE49-F238E27FC236}">
-                <a16:creationId xmlns:a16="http://schemas.microsoft.com/office/drawing/2014/main" id="{E4EEB6EA-2061-4A06-9573-8336AA52CEBB}"/>
+                <a16:creationId xmlns:a16="http://schemas.microsoft.com/office/drawing/2014/main" id="{80F7C97B-7C07-4150-8760-F7BB3C32D084}"/>
               </a:ext>
             </a:extLst>
           </p:cNvPr>
@@ -12906,7 +12906,7 @@
           <p:nvPr/>
         </p:nvPicPr>
         <p:blipFill>
-          <a:blip xmlns:r="http://schemas.openxmlformats.org/officeDocument/2006/relationships" xmlns:a="http://schemas.openxmlformats.org/drawingml/2006/main" r:embed="R2c32c0bf63b9429f"/>
+          <a:blip xmlns:r="http://schemas.openxmlformats.org/officeDocument/2006/relationships" xmlns:a="http://schemas.openxmlformats.org/drawingml/2006/main" r:embed="R9d1890981dbe46e9"/>
           <a:stretch xmlns:a="http://schemas.openxmlformats.org/drawingml/2006/main"/>
         </p:blipFill>
         <p:spPr>
@@ -12924,7 +12924,7 @@
           <p:cNvPr id="3" name="">
             <a:extLst xmlns:a="http://schemas.openxmlformats.org/drawingml/2006/main">
               <a:ext uri="{FF2B5EF4-FFF2-40B4-BE49-F238E27FC236}">
-                <a16:creationId xmlns:a16="http://schemas.microsoft.com/office/drawing/2014/main" id="{166B5D0E-5D03-4CBE-A8BE-6BE4CF78BB13}"/>
+                <a16:creationId xmlns:a16="http://schemas.microsoft.com/office/drawing/2014/main" id="{26BB39A4-C3D3-49A1-A5B7-07B902267367}"/>
               </a:ext>
             </a:extLst>
           </p:cNvPr>
@@ -12962,14 +12962,14 @@
             <a:pPr algn="r">
               <a:defRPr sz="825" b="1">
                 <a:solidFill>
-                  <a:srgbClr val="0E1B3E"/>
+                  <a:srgbClr val="070F26"/>
                 </a:solidFill>
               </a:defRPr>
             </a:pPr>
             <a:r>
               <a:rPr sz="825" b="1">
                 <a:solidFill>
-                  <a:srgbClr val="0E1B3E"/>
+                  <a:srgbClr val="070F26"/>
                 </a:solidFill>
               </a:rPr>
               <a:t>NTT DATA UNIVERSITY</a:t>
@@ -12982,7 +12982,7 @@
           <p:cNvPr id="4" name="">
             <a:extLst xmlns:a="http://schemas.openxmlformats.org/drawingml/2006/main">
               <a:ext uri="{FF2B5EF4-FFF2-40B4-BE49-F238E27FC236}">
-                <a16:creationId xmlns:a16="http://schemas.microsoft.com/office/drawing/2014/main" id="{0DB47637-A6D6-4C13-BC41-DC9944BAF2A8}"/>
+                <a16:creationId xmlns:a16="http://schemas.microsoft.com/office/drawing/2014/main" id="{2D74AEAD-ECB2-4E28-B463-A6B18C4A9649}"/>
               </a:ext>
             </a:extLst>
           </p:cNvPr>
@@ -13040,7 +13040,7 @@
           <p:cNvPr id="5" name="">
             <a:extLst xmlns:a="http://schemas.openxmlformats.org/drawingml/2006/main">
               <a:ext uri="{FF2B5EF4-FFF2-40B4-BE49-F238E27FC236}">
-                <a16:creationId xmlns:a16="http://schemas.microsoft.com/office/drawing/2014/main" id="{5B9B1E9A-8EFB-4557-9392-F2EA9C4DB8D4}"/>
+                <a16:creationId xmlns:a16="http://schemas.microsoft.com/office/drawing/2014/main" id="{50CBB5CB-125A-4D35-8AED-32D85FE17A5B}"/>
               </a:ext>
             </a:extLst>
           </p:cNvPr>
@@ -13098,7 +13098,7 @@
           <p:cNvPr id="6" name="">
             <a:extLst xmlns:a="http://schemas.openxmlformats.org/drawingml/2006/main">
               <a:ext uri="{FF2B5EF4-FFF2-40B4-BE49-F238E27FC236}">
-                <a16:creationId xmlns:a16="http://schemas.microsoft.com/office/drawing/2014/main" id="{A09078AA-D4F9-4F34-AEA3-FF171BE66910}"/>
+                <a16:creationId xmlns:a16="http://schemas.microsoft.com/office/drawing/2014/main" id="{C36DEF97-26AD-4E99-B12E-6D8EB622EF09}"/>
               </a:ext>
             </a:extLst>
           </p:cNvPr>
@@ -13136,14 +13136,14 @@
             <a:pPr algn="r">
               <a:defRPr sz="675" b="1">
                 <a:solidFill>
-                  <a:srgbClr val="0E1B3E"/>
+                  <a:srgbClr val="070F26"/>
                 </a:solidFill>
               </a:defRPr>
             </a:pPr>
             <a:r>
               <a:rPr sz="675" b="1">
                 <a:solidFill>
-                  <a:srgbClr val="0E1B3E"/>
+                  <a:srgbClr val="070F26"/>
                 </a:solidFill>
               </a:rPr>
               <a:t>NTT DATA UNIVERSITY</a:t>
@@ -13156,7 +13156,7 @@
           <p:cNvPr id="7" name="">
             <a:extLst xmlns:a="http://schemas.openxmlformats.org/drawingml/2006/main">
               <a:ext uri="{FF2B5EF4-FFF2-40B4-BE49-F238E27FC236}">
-                <a16:creationId xmlns:a16="http://schemas.microsoft.com/office/drawing/2014/main" id="{2F7E2680-D5AD-4CDA-9AA3-9E548A723472}"/>
+                <a16:creationId xmlns:a16="http://schemas.microsoft.com/office/drawing/2014/main" id="{1DE5A049-E27C-4506-BB19-27D251B3CE8E}"/>
               </a:ext>
             </a:extLst>
           </p:cNvPr>
@@ -13214,7 +13214,7 @@
           <p:cNvPr id="8" name="">
             <a:extLst xmlns:a="http://schemas.openxmlformats.org/drawingml/2006/main">
               <a:ext uri="{FF2B5EF4-FFF2-40B4-BE49-F238E27FC236}">
-                <a16:creationId xmlns:a16="http://schemas.microsoft.com/office/drawing/2014/main" id="{B8F547B9-7862-4F65-BC4A-DBE2994AF7F2}"/>
+                <a16:creationId xmlns:a16="http://schemas.microsoft.com/office/drawing/2014/main" id="{B21FC733-70C6-4399-A494-ADC57588222A}"/>
               </a:ext>
             </a:extLst>
           </p:cNvPr>
@@ -13252,14 +13252,14 @@
             <a:pPr algn="l">
               <a:defRPr sz="2400" b="0">
                 <a:solidFill>
-                  <a:srgbClr val="0E1B3E"/>
+                  <a:srgbClr val="070F26"/>
                 </a:solidFill>
               </a:defRPr>
             </a:pPr>
             <a:r>
               <a:rPr sz="2400" b="0">
                 <a:solidFill>
-                  <a:srgbClr val="0E1B3E"/>
+                  <a:srgbClr val="070F26"/>
                 </a:solidFill>
               </a:rPr>
               <a:t>Os dados "limpos" do banco não vão direto para trusted/</a:t>
@@ -13272,7 +13272,7 @@
           <p:cNvPr id="9" name="">
             <a:extLst xmlns:a="http://schemas.openxmlformats.org/drawingml/2006/main">
               <a:ext uri="{FF2B5EF4-FFF2-40B4-BE49-F238E27FC236}">
-                <a16:creationId xmlns:a16="http://schemas.microsoft.com/office/drawing/2014/main" id="{FE044E9B-21ED-41BB-8540-07AC45D44C96}"/>
+                <a16:creationId xmlns:a16="http://schemas.microsoft.com/office/drawing/2014/main" id="{5A1C7F4E-9A15-4F12-B1D5-FD7422EF8F46}"/>
               </a:ext>
             </a:extLst>
           </p:cNvPr>
@@ -13330,7 +13330,7 @@
           <p:cNvPr id="10" name="">
             <a:extLst xmlns:a="http://schemas.openxmlformats.org/drawingml/2006/main">
               <a:ext uri="{FF2B5EF4-FFF2-40B4-BE49-F238E27FC236}">
-                <a16:creationId xmlns:a16="http://schemas.microsoft.com/office/drawing/2014/main" id="{09E53164-9D81-474F-B121-3C5CC4DB5123}"/>
+                <a16:creationId xmlns:a16="http://schemas.microsoft.com/office/drawing/2014/main" id="{6550FDE5-F5D3-485A-A832-FE67AC22E4BA}"/>
               </a:ext>
             </a:extLst>
           </p:cNvPr>
@@ -13363,7 +13363,7 @@
           <p:cNvPr id="11" name="">
             <a:extLst xmlns:a="http://schemas.openxmlformats.org/drawingml/2006/main">
               <a:ext uri="{FF2B5EF4-FFF2-40B4-BE49-F238E27FC236}">
-                <a16:creationId xmlns:a16="http://schemas.microsoft.com/office/drawing/2014/main" id="{4E460E8A-387F-43E5-A2F2-D62C449C3692}"/>
+                <a16:creationId xmlns:a16="http://schemas.microsoft.com/office/drawing/2014/main" id="{A9E6380D-41CB-460B-8C89-091DF0AEFB1E}"/>
               </a:ext>
             </a:extLst>
           </p:cNvPr>
@@ -13398,7 +13398,7 @@
           <p:cNvPr id="12" name="">
             <a:extLst xmlns:a="http://schemas.openxmlformats.org/drawingml/2006/main">
               <a:ext uri="{FF2B5EF4-FFF2-40B4-BE49-F238E27FC236}">
-                <a16:creationId xmlns:a16="http://schemas.microsoft.com/office/drawing/2014/main" id="{3F89D167-B5C6-4745-A978-01F1E4084EFB}"/>
+                <a16:creationId xmlns:a16="http://schemas.microsoft.com/office/drawing/2014/main" id="{ECB8C0D6-1ADC-47D8-AD4B-A284A5588FBE}"/>
               </a:ext>
             </a:extLst>
           </p:cNvPr>
@@ -13456,7 +13456,7 @@
           <p:cNvPr id="13" name="">
             <a:extLst xmlns:a="http://schemas.openxmlformats.org/drawingml/2006/main">
               <a:ext uri="{FF2B5EF4-FFF2-40B4-BE49-F238E27FC236}">
-                <a16:creationId xmlns:a16="http://schemas.microsoft.com/office/drawing/2014/main" id="{2814A021-B6A9-49A4-AE13-D18268BDD93C}"/>
+                <a16:creationId xmlns:a16="http://schemas.microsoft.com/office/drawing/2014/main" id="{9B778892-4BA6-4E2C-97EB-E963564D247E}"/>
               </a:ext>
             </a:extLst>
           </p:cNvPr>
@@ -13548,7 +13548,7 @@
           <p:cNvPr id="14" name="">
             <a:extLst xmlns:a="http://schemas.openxmlformats.org/drawingml/2006/main">
               <a:ext uri="{FF2B5EF4-FFF2-40B4-BE49-F238E27FC236}">
-                <a16:creationId xmlns:a16="http://schemas.microsoft.com/office/drawing/2014/main" id="{090501D9-7648-4EB9-8697-95808F0E6F9B}"/>
+                <a16:creationId xmlns:a16="http://schemas.microsoft.com/office/drawing/2014/main" id="{3C7A5488-01D1-4937-8C62-A686F2CE22FE}"/>
               </a:ext>
             </a:extLst>
           </p:cNvPr>
@@ -13581,7 +13581,7 @@
           <p:cNvPr id="15" name="">
             <a:extLst xmlns:a="http://schemas.openxmlformats.org/drawingml/2006/main">
               <a:ext uri="{FF2B5EF4-FFF2-40B4-BE49-F238E27FC236}">
-                <a16:creationId xmlns:a16="http://schemas.microsoft.com/office/drawing/2014/main" id="{AA414864-7462-4B85-A488-6E34849A4C23}"/>
+                <a16:creationId xmlns:a16="http://schemas.microsoft.com/office/drawing/2014/main" id="{65CC6EF2-DA60-479A-BC8D-6D6A036050A8}"/>
               </a:ext>
             </a:extLst>
           </p:cNvPr>
@@ -13616,7 +13616,7 @@
           <p:cNvPr id="16" name="">
             <a:extLst xmlns:a="http://schemas.openxmlformats.org/drawingml/2006/main">
               <a:ext uri="{FF2B5EF4-FFF2-40B4-BE49-F238E27FC236}">
-                <a16:creationId xmlns:a16="http://schemas.microsoft.com/office/drawing/2014/main" id="{163F0458-10A4-413F-A83F-5C1CC44A07A4}"/>
+                <a16:creationId xmlns:a16="http://schemas.microsoft.com/office/drawing/2014/main" id="{9973D132-FE1E-46EE-AC9B-675B59FFBA5A}"/>
               </a:ext>
             </a:extLst>
           </p:cNvPr>
@@ -13674,7 +13674,7 @@
           <p:cNvPr id="17" name="">
             <a:extLst xmlns:a="http://schemas.openxmlformats.org/drawingml/2006/main">
               <a:ext uri="{FF2B5EF4-FFF2-40B4-BE49-F238E27FC236}">
-                <a16:creationId xmlns:a16="http://schemas.microsoft.com/office/drawing/2014/main" id="{FD6F39EE-BBD4-4D81-A0F3-289F12AAC0BA}"/>
+                <a16:creationId xmlns:a16="http://schemas.microsoft.com/office/drawing/2014/main" id="{E2115DB3-82D9-4BEC-AF48-40C063D70369}"/>
               </a:ext>
             </a:extLst>
           </p:cNvPr>
@@ -13766,7 +13766,7 @@
           <p:cNvPr id="18" name="">
             <a:extLst xmlns:a="http://schemas.openxmlformats.org/drawingml/2006/main">
               <a:ext uri="{FF2B5EF4-FFF2-40B4-BE49-F238E27FC236}">
-                <a16:creationId xmlns:a16="http://schemas.microsoft.com/office/drawing/2014/main" id="{97BF2C79-C8F5-46A2-9B87-E67D814699ED}"/>
+                <a16:creationId xmlns:a16="http://schemas.microsoft.com/office/drawing/2014/main" id="{40F7FE21-55EF-403E-AAE5-C5FFFFD12D73}"/>
               </a:ext>
             </a:extLst>
           </p:cNvPr>
@@ -13799,7 +13799,7 @@
           <p:cNvPr id="19" name="">
             <a:extLst xmlns:a="http://schemas.openxmlformats.org/drawingml/2006/main">
               <a:ext uri="{FF2B5EF4-FFF2-40B4-BE49-F238E27FC236}">
-                <a16:creationId xmlns:a16="http://schemas.microsoft.com/office/drawing/2014/main" id="{3BE3469D-AD50-4892-BBFF-76B1E5E253D6}"/>
+                <a16:creationId xmlns:a16="http://schemas.microsoft.com/office/drawing/2014/main" id="{EA9666A5-62C2-4889-9001-4EF148118C4E}"/>
               </a:ext>
             </a:extLst>
           </p:cNvPr>
@@ -13834,7 +13834,7 @@
           <p:cNvPr id="20" name="">
             <a:extLst xmlns:a="http://schemas.openxmlformats.org/drawingml/2006/main">
               <a:ext uri="{FF2B5EF4-FFF2-40B4-BE49-F238E27FC236}">
-                <a16:creationId xmlns:a16="http://schemas.microsoft.com/office/drawing/2014/main" id="{D8EE46AB-B49E-4FEA-AD2C-6B9EB6E594DD}"/>
+                <a16:creationId xmlns:a16="http://schemas.microsoft.com/office/drawing/2014/main" id="{ABAEE71F-2303-4C8B-98AD-BEA2D12BC805}"/>
               </a:ext>
             </a:extLst>
           </p:cNvPr>
@@ -13892,7 +13892,7 @@
           <p:cNvPr id="21" name="">
             <a:extLst xmlns:a="http://schemas.openxmlformats.org/drawingml/2006/main">
               <a:ext uri="{FF2B5EF4-FFF2-40B4-BE49-F238E27FC236}">
-                <a16:creationId xmlns:a16="http://schemas.microsoft.com/office/drawing/2014/main" id="{2ACF234F-6B78-420D-96EB-A6639C2279B7}"/>
+                <a16:creationId xmlns:a16="http://schemas.microsoft.com/office/drawing/2014/main" id="{9FBA6F7B-08AE-46E9-B704-0B5A7D178466}"/>
               </a:ext>
             </a:extLst>
           </p:cNvPr>
@@ -13982,7 +13982,7 @@
     </p:spTree>
     <p:extLst>
       <p:ext uri="{BB962C8B-B14F-4D97-AF65-F5344CB8AC3E}">
-        <p14:creationId xmlns:p14="http://schemas.microsoft.com/office/powerpoint/2010/main" val="482998069"/>
+        <p14:creationId xmlns:p14="http://schemas.microsoft.com/office/powerpoint/2010/main" val="1493961881"/>
       </p:ext>
     </p:extLst>
   </p:cSld>
@@ -14013,7 +14013,7 @@
           <p:cNvPr id="1" name="">
             <a:extLst xmlns:a="http://schemas.openxmlformats.org/drawingml/2006/main">
               <a:ext uri="{FF2B5EF4-FFF2-40B4-BE49-F238E27FC236}">
-                <a16:creationId xmlns:a16="http://schemas.microsoft.com/office/drawing/2014/main" id="{F44714D3-B6CC-4F17-B2F0-93C0443EF35F}"/>
+                <a16:creationId xmlns:a16="http://schemas.microsoft.com/office/drawing/2014/main" id="{4380E796-60FE-467D-BE57-462802601BBC}"/>
               </a:ext>
             </a:extLst>
           </p:cNvPr>
@@ -14052,7 +14052,7 @@
           <p:nvPr/>
         </p:nvPicPr>
         <p:blipFill>
-          <a:blip xmlns:r="http://schemas.openxmlformats.org/officeDocument/2006/relationships" xmlns:a="http://schemas.openxmlformats.org/drawingml/2006/main" r:embed="R0500dcbc1d5a433a"/>
+          <a:blip xmlns:r="http://schemas.openxmlformats.org/officeDocument/2006/relationships" xmlns:a="http://schemas.openxmlformats.org/drawingml/2006/main" r:embed="Ra46179ddc6064c59"/>
           <a:stretch xmlns:a="http://schemas.openxmlformats.org/drawingml/2006/main"/>
         </p:blipFill>
         <p:spPr>
@@ -14070,7 +14070,7 @@
           <p:cNvPr id="3" name="">
             <a:extLst xmlns:a="http://schemas.openxmlformats.org/drawingml/2006/main">
               <a:ext uri="{FF2B5EF4-FFF2-40B4-BE49-F238E27FC236}">
-                <a16:creationId xmlns:a16="http://schemas.microsoft.com/office/drawing/2014/main" id="{DC39F07F-D87A-476C-A941-B0E5F06FF49D}"/>
+                <a16:creationId xmlns:a16="http://schemas.microsoft.com/office/drawing/2014/main" id="{F629E2E6-7A15-4E3D-A2F7-B1E46C50C950}"/>
               </a:ext>
             </a:extLst>
           </p:cNvPr>
@@ -14108,14 +14108,14 @@
             <a:pPr algn="r">
               <a:defRPr sz="825" b="1">
                 <a:solidFill>
-                  <a:srgbClr val="0E1B3E"/>
+                  <a:srgbClr val="070F26"/>
                 </a:solidFill>
               </a:defRPr>
             </a:pPr>
             <a:r>
               <a:rPr sz="825" b="1">
                 <a:solidFill>
-                  <a:srgbClr val="0E1B3E"/>
+                  <a:srgbClr val="070F26"/>
                 </a:solidFill>
               </a:rPr>
               <a:t>NTT DATA UNIVERSITY</a:t>
@@ -14128,7 +14128,7 @@
           <p:cNvPr id="4" name="">
             <a:extLst xmlns:a="http://schemas.openxmlformats.org/drawingml/2006/main">
               <a:ext uri="{FF2B5EF4-FFF2-40B4-BE49-F238E27FC236}">
-                <a16:creationId xmlns:a16="http://schemas.microsoft.com/office/drawing/2014/main" id="{0C52729D-6E4A-4DE1-98C9-0F099E4EDA7B}"/>
+                <a16:creationId xmlns:a16="http://schemas.microsoft.com/office/drawing/2014/main" id="{88122CA1-A135-436A-8522-6612C4CB646E}"/>
               </a:ext>
             </a:extLst>
           </p:cNvPr>
@@ -14186,7 +14186,7 @@
           <p:cNvPr id="5" name="">
             <a:extLst xmlns:a="http://schemas.openxmlformats.org/drawingml/2006/main">
               <a:ext uri="{FF2B5EF4-FFF2-40B4-BE49-F238E27FC236}">
-                <a16:creationId xmlns:a16="http://schemas.microsoft.com/office/drawing/2014/main" id="{30ECE124-2676-40CA-84CF-8915DF482688}"/>
+                <a16:creationId xmlns:a16="http://schemas.microsoft.com/office/drawing/2014/main" id="{8C98CA8F-0F26-4803-871D-C77B14EBB365}"/>
               </a:ext>
             </a:extLst>
           </p:cNvPr>
@@ -14244,7 +14244,7 @@
           <p:cNvPr id="6" name="">
             <a:extLst xmlns:a="http://schemas.openxmlformats.org/drawingml/2006/main">
               <a:ext uri="{FF2B5EF4-FFF2-40B4-BE49-F238E27FC236}">
-                <a16:creationId xmlns:a16="http://schemas.microsoft.com/office/drawing/2014/main" id="{6B291ACC-06CF-4DE5-8BC2-830FF7AB3CE5}"/>
+                <a16:creationId xmlns:a16="http://schemas.microsoft.com/office/drawing/2014/main" id="{198CE2B2-7042-4813-B205-9C030BDF1680}"/>
               </a:ext>
             </a:extLst>
           </p:cNvPr>
@@ -14282,14 +14282,14 @@
             <a:pPr algn="r">
               <a:defRPr sz="675" b="1">
                 <a:solidFill>
-                  <a:srgbClr val="0E1B3E"/>
+                  <a:srgbClr val="070F26"/>
                 </a:solidFill>
               </a:defRPr>
             </a:pPr>
             <a:r>
               <a:rPr sz="675" b="1">
                 <a:solidFill>
-                  <a:srgbClr val="0E1B3E"/>
+                  <a:srgbClr val="070F26"/>
                 </a:solidFill>
               </a:rPr>
               <a:t>NTT DATA UNIVERSITY</a:t>
@@ -14302,7 +14302,7 @@
           <p:cNvPr id="7" name="">
             <a:extLst xmlns:a="http://schemas.openxmlformats.org/drawingml/2006/main">
               <a:ext uri="{FF2B5EF4-FFF2-40B4-BE49-F238E27FC236}">
-                <a16:creationId xmlns:a16="http://schemas.microsoft.com/office/drawing/2014/main" id="{63A230BB-9B0E-4AFE-924A-A991BE1158B0}"/>
+                <a16:creationId xmlns:a16="http://schemas.microsoft.com/office/drawing/2014/main" id="{22B0BAE1-A005-44E6-9705-7C30E187D5C1}"/>
               </a:ext>
             </a:extLst>
           </p:cNvPr>
@@ -14360,7 +14360,7 @@
           <p:cNvPr id="8" name="">
             <a:extLst xmlns:a="http://schemas.openxmlformats.org/drawingml/2006/main">
               <a:ext uri="{FF2B5EF4-FFF2-40B4-BE49-F238E27FC236}">
-                <a16:creationId xmlns:a16="http://schemas.microsoft.com/office/drawing/2014/main" id="{FF479EEF-F8CD-496D-86DD-E94279052F65}"/>
+                <a16:creationId xmlns:a16="http://schemas.microsoft.com/office/drawing/2014/main" id="{E73C34EC-27D3-46F5-AB46-CDD9CC642AAB}"/>
               </a:ext>
             </a:extLst>
           </p:cNvPr>
@@ -14398,14 +14398,14 @@
             <a:pPr algn="l">
               <a:defRPr sz="2400" b="0">
                 <a:solidFill>
-                  <a:srgbClr val="0E1B3E"/>
+                  <a:srgbClr val="070F26"/>
                 </a:solidFill>
               </a:defRPr>
             </a:pPr>
             <a:r>
               <a:rPr sz="2400" b="0">
                 <a:solidFill>
-                  <a:srgbClr val="0E1B3E"/>
+                  <a:srgbClr val="070F26"/>
                 </a:solidFill>
               </a:rPr>
               <a:t>Ler PySpark sem precisar instalar Spark</a:t>
@@ -14418,7 +14418,7 @@
           <p:cNvPr id="9" name="">
             <a:extLst xmlns:a="http://schemas.openxmlformats.org/drawingml/2006/main">
               <a:ext uri="{FF2B5EF4-FFF2-40B4-BE49-F238E27FC236}">
-                <a16:creationId xmlns:a16="http://schemas.microsoft.com/office/drawing/2014/main" id="{EDA16F79-CCB4-4264-A870-B607BB3A3306}"/>
+                <a16:creationId xmlns:a16="http://schemas.microsoft.com/office/drawing/2014/main" id="{63BD8330-969A-483B-9871-9421A455B51D}"/>
               </a:ext>
             </a:extLst>
           </p:cNvPr>
@@ -14476,7 +14476,7 @@
           <p:cNvPr id="10" name="">
             <a:extLst xmlns:a="http://schemas.openxmlformats.org/drawingml/2006/main">
               <a:ext uri="{FF2B5EF4-FFF2-40B4-BE49-F238E27FC236}">
-                <a16:creationId xmlns:a16="http://schemas.microsoft.com/office/drawing/2014/main" id="{086CE2D3-8640-4A3C-9801-C8F15DD8F653}"/>
+                <a16:creationId xmlns:a16="http://schemas.microsoft.com/office/drawing/2014/main" id="{61E7B3BD-DD2D-45A8-AF53-C7BE54B33DC3}"/>
               </a:ext>
             </a:extLst>
           </p:cNvPr>
@@ -14509,7 +14509,7 @@
           <p:cNvPr id="11" name="">
             <a:extLst xmlns:a="http://schemas.openxmlformats.org/drawingml/2006/main">
               <a:ext uri="{FF2B5EF4-FFF2-40B4-BE49-F238E27FC236}">
-                <a16:creationId xmlns:a16="http://schemas.microsoft.com/office/drawing/2014/main" id="{59F8A4DA-C798-4CA4-AFA4-9844822BE2CC}"/>
+                <a16:creationId xmlns:a16="http://schemas.microsoft.com/office/drawing/2014/main" id="{1DE9837D-7128-47DB-B182-6F5782C446EF}"/>
               </a:ext>
             </a:extLst>
           </p:cNvPr>
@@ -14544,7 +14544,7 @@
           <p:cNvPr id="12" name="">
             <a:extLst xmlns:a="http://schemas.openxmlformats.org/drawingml/2006/main">
               <a:ext uri="{FF2B5EF4-FFF2-40B4-BE49-F238E27FC236}">
-                <a16:creationId xmlns:a16="http://schemas.microsoft.com/office/drawing/2014/main" id="{A5A747F5-44FA-4152-96CE-AC8035850BEA}"/>
+                <a16:creationId xmlns:a16="http://schemas.microsoft.com/office/drawing/2014/main" id="{05E143B1-7E95-483D-A23F-B7E52B8FC2C4}"/>
               </a:ext>
             </a:extLst>
           </p:cNvPr>
@@ -14602,7 +14602,7 @@
           <p:cNvPr id="13" name="">
             <a:extLst xmlns:a="http://schemas.openxmlformats.org/drawingml/2006/main">
               <a:ext uri="{FF2B5EF4-FFF2-40B4-BE49-F238E27FC236}">
-                <a16:creationId xmlns:a16="http://schemas.microsoft.com/office/drawing/2014/main" id="{7534A116-4F10-4C01-A9D4-3FF9D753C28B}"/>
+                <a16:creationId xmlns:a16="http://schemas.microsoft.com/office/drawing/2014/main" id="{8BF92387-DBC5-4827-99AB-EEAFA936C4B8}"/>
               </a:ext>
             </a:extLst>
           </p:cNvPr>
@@ -14847,7 +14847,7 @@
           <p:cNvPr id="14" name="">
             <a:extLst xmlns:a="http://schemas.openxmlformats.org/drawingml/2006/main">
               <a:ext uri="{FF2B5EF4-FFF2-40B4-BE49-F238E27FC236}">
-                <a16:creationId xmlns:a16="http://schemas.microsoft.com/office/drawing/2014/main" id="{F0C8821D-B4E2-42BC-B340-41C0B7F51488}"/>
+                <a16:creationId xmlns:a16="http://schemas.microsoft.com/office/drawing/2014/main" id="{58FAA3A7-CCA3-4ED9-A758-59BB346480E4}"/>
               </a:ext>
             </a:extLst>
           </p:cNvPr>
@@ -14880,7 +14880,7 @@
           <p:cNvPr id="15" name="">
             <a:extLst xmlns:a="http://schemas.openxmlformats.org/drawingml/2006/main">
               <a:ext uri="{FF2B5EF4-FFF2-40B4-BE49-F238E27FC236}">
-                <a16:creationId xmlns:a16="http://schemas.microsoft.com/office/drawing/2014/main" id="{AADC7BB3-4BC0-4590-8C20-9CDE9556526E}"/>
+                <a16:creationId xmlns:a16="http://schemas.microsoft.com/office/drawing/2014/main" id="{9AC07940-9490-483E-BC1E-BB59FC8FD1E2}"/>
               </a:ext>
             </a:extLst>
           </p:cNvPr>
@@ -14915,7 +14915,7 @@
           <p:cNvPr id="16" name="">
             <a:extLst xmlns:a="http://schemas.openxmlformats.org/drawingml/2006/main">
               <a:ext uri="{FF2B5EF4-FFF2-40B4-BE49-F238E27FC236}">
-                <a16:creationId xmlns:a16="http://schemas.microsoft.com/office/drawing/2014/main" id="{9DAB4034-5496-4889-B365-130CA03B4D7B}"/>
+                <a16:creationId xmlns:a16="http://schemas.microsoft.com/office/drawing/2014/main" id="{2A0E5A24-CF05-481D-9471-3888B8E298AC}"/>
               </a:ext>
             </a:extLst>
           </p:cNvPr>
@@ -14973,7 +14973,7 @@
           <p:cNvPr id="17" name="">
             <a:extLst xmlns:a="http://schemas.openxmlformats.org/drawingml/2006/main">
               <a:ext uri="{FF2B5EF4-FFF2-40B4-BE49-F238E27FC236}">
-                <a16:creationId xmlns:a16="http://schemas.microsoft.com/office/drawing/2014/main" id="{2D403CF0-742E-4BB1-9BC1-25BAC7AE749E}"/>
+                <a16:creationId xmlns:a16="http://schemas.microsoft.com/office/drawing/2014/main" id="{181D1C43-5FF8-44FC-A192-42F2EDB11E6F}"/>
               </a:ext>
             </a:extLst>
           </p:cNvPr>
@@ -15182,7 +15182,7 @@
     </p:spTree>
     <p:extLst>
       <p:ext uri="{BB962C8B-B14F-4D97-AF65-F5344CB8AC3E}">
-        <p14:creationId xmlns:p14="http://schemas.microsoft.com/office/powerpoint/2010/main" val="2082349418"/>
+        <p14:creationId xmlns:p14="http://schemas.microsoft.com/office/powerpoint/2010/main" val="1193103348"/>
       </p:ext>
     </p:extLst>
   </p:cSld>
